--- a/Automotive_Protocols.pptx
+++ b/Automotive_Protocols.pptx
@@ -26,7 +26,8 @@
     <p:sldId id="290" r:id="rId20"/>
     <p:sldId id="291" r:id="rId21"/>
     <p:sldId id="270" r:id="rId22"/>
-    <p:sldId id="274" r:id="rId23"/>
+    <p:sldId id="292" r:id="rId23"/>
+    <p:sldId id="274" r:id="rId24"/>
   </p:sldIdLst>
   <p:sldSz cx="12192000" cy="6858000"/>
   <p:notesSz cx="6858000" cy="9144000"/>
@@ -136,7 +137,7 @@
 <file path=ppt/revisionInfo.xml><?xml version="1.0" encoding="utf-8"?>
 <p1510:revInfo xmlns:a="http://schemas.openxmlformats.org/drawingml/2006/main" xmlns:r="http://schemas.openxmlformats.org/officeDocument/2006/relationships" xmlns:p1510="http://schemas.microsoft.com/office/powerpoint/2015/10/main">
   <p1510:revLst>
-    <p1510:client id="{34C362B8-B552-465B-AB89-366CD7DA00F1}" v="24" dt="2026-05-25T09:39:53.019"/>
+    <p1510:client id="{34C362B8-B552-465B-AB89-366CD7DA00F1}" v="4" dt="2026-05-28T07:34:17.838"/>
   </p1510:revLst>
 </p1510:revInfo>
 </file>
@@ -145,11 +146,34 @@
 <pc:chgInfo xmlns:a="http://schemas.openxmlformats.org/drawingml/2006/main" xmlns:r="http://schemas.openxmlformats.org/officeDocument/2006/relationships" xmlns:ac="http://schemas.microsoft.com/office/drawing/2013/main/command" xmlns:pc="http://schemas.microsoft.com/office/powerpoint/2013/main/command">
   <pc:docChgLst>
     <pc:chgData name="Sutar, Monal Gajanan (Cognizant)" userId="cbef091d-1278-48f6-97ae-0b476c410a24" providerId="ADAL" clId="{69AB6919-4147-41D2-8237-888729AF7CC5}"/>
-    <pc:docChg chg="undo custSel addSld modSld sldOrd">
-      <pc:chgData name="Sutar, Monal Gajanan (Cognizant)" userId="cbef091d-1278-48f6-97ae-0b476c410a24" providerId="ADAL" clId="{69AB6919-4147-41D2-8237-888729AF7CC5}" dt="2026-05-25T10:00:23.194" v="159"/>
+    <pc:docChg chg="undo custSel addSld delSld modSld sldOrd">
+      <pc:chgData name="Sutar, Monal Gajanan (Cognizant)" userId="cbef091d-1278-48f6-97ae-0b476c410a24" providerId="ADAL" clId="{69AB6919-4147-41D2-8237-888729AF7CC5}" dt="2026-05-28T09:20:07.636" v="374" actId="2710"/>
       <pc:docMkLst>
         <pc:docMk/>
       </pc:docMkLst>
+      <pc:sldChg chg="addSp modSp mod">
+        <pc:chgData name="Sutar, Monal Gajanan (Cognizant)" userId="cbef091d-1278-48f6-97ae-0b476c410a24" providerId="ADAL" clId="{69AB6919-4147-41D2-8237-888729AF7CC5}" dt="2026-05-28T07:10:49.060" v="307" actId="1076"/>
+        <pc:sldMkLst>
+          <pc:docMk/>
+          <pc:sldMk cId="0" sldId="267"/>
+        </pc:sldMkLst>
+        <pc:spChg chg="add mod">
+          <ac:chgData name="Sutar, Monal Gajanan (Cognizant)" userId="cbef091d-1278-48f6-97ae-0b476c410a24" providerId="ADAL" clId="{69AB6919-4147-41D2-8237-888729AF7CC5}" dt="2026-05-28T07:10:38.860" v="304" actId="14100"/>
+          <ac:spMkLst>
+            <pc:docMk/>
+            <pc:sldMk cId="0" sldId="267"/>
+            <ac:spMk id="3" creationId="{1A405815-7771-39CD-20D1-D276DBD004AE}"/>
+          </ac:spMkLst>
+        </pc:spChg>
+        <pc:graphicFrameChg chg="mod">
+          <ac:chgData name="Sutar, Monal Gajanan (Cognizant)" userId="cbef091d-1278-48f6-97ae-0b476c410a24" providerId="ADAL" clId="{69AB6919-4147-41D2-8237-888729AF7CC5}" dt="2026-05-28T07:10:49.060" v="307" actId="1076"/>
+          <ac:graphicFrameMkLst>
+            <pc:docMk/>
+            <pc:sldMk cId="0" sldId="267"/>
+            <ac:graphicFrameMk id="23" creationId="{8117E4D1-02F4-3E38-3272-C19C047ABFF2}"/>
+          </ac:graphicFrameMkLst>
+        </pc:graphicFrameChg>
+      </pc:sldChg>
       <pc:sldChg chg="addSp modSp mod setBg">
         <pc:chgData name="Sutar, Monal Gajanan (Cognizant)" userId="cbef091d-1278-48f6-97ae-0b476c410a24" providerId="ADAL" clId="{69AB6919-4147-41D2-8237-888729AF7CC5}" dt="2026-05-25T09:11:10.220" v="12" actId="26606"/>
         <pc:sldMkLst>
@@ -205,14 +229,45 @@
           </ac:spMkLst>
         </pc:spChg>
       </pc:sldChg>
-      <pc:sldChg chg="addSp modSp mod ord setBg">
-        <pc:chgData name="Sutar, Monal Gajanan (Cognizant)" userId="cbef091d-1278-48f6-97ae-0b476c410a24" providerId="ADAL" clId="{69AB6919-4147-41D2-8237-888729AF7CC5}" dt="2026-05-25T09:43:36.044" v="157"/>
+      <pc:sldChg chg="modSp mod">
+        <pc:chgData name="Sutar, Monal Gajanan (Cognizant)" userId="cbef091d-1278-48f6-97ae-0b476c410a24" providerId="ADAL" clId="{69AB6919-4147-41D2-8237-888729AF7CC5}" dt="2026-05-28T09:16:44.780" v="342" actId="1076"/>
+        <pc:sldMkLst>
+          <pc:docMk/>
+          <pc:sldMk cId="0" sldId="269"/>
+        </pc:sldMkLst>
+        <pc:spChg chg="mod">
+          <ac:chgData name="Sutar, Monal Gajanan (Cognizant)" userId="cbef091d-1278-48f6-97ae-0b476c410a24" providerId="ADAL" clId="{69AB6919-4147-41D2-8237-888729AF7CC5}" dt="2026-05-28T09:16:44.780" v="342" actId="1076"/>
+          <ac:spMkLst>
+            <pc:docMk/>
+            <pc:sldMk cId="0" sldId="269"/>
+            <ac:spMk id="2" creationId="{00000000-0000-0000-0000-000000000000}"/>
+          </ac:spMkLst>
+        </pc:spChg>
+        <pc:spChg chg="mod">
+          <ac:chgData name="Sutar, Monal Gajanan (Cognizant)" userId="cbef091d-1278-48f6-97ae-0b476c410a24" providerId="ADAL" clId="{69AB6919-4147-41D2-8237-888729AF7CC5}" dt="2026-05-28T07:33:15.816" v="323" actId="14100"/>
+          <ac:spMkLst>
+            <pc:docMk/>
+            <pc:sldMk cId="0" sldId="269"/>
+            <ac:spMk id="3" creationId="{00000000-0000-0000-0000-000000000000}"/>
+          </ac:spMkLst>
+        </pc:spChg>
+        <pc:picChg chg="mod">
+          <ac:chgData name="Sutar, Monal Gajanan (Cognizant)" userId="cbef091d-1278-48f6-97ae-0b476c410a24" providerId="ADAL" clId="{69AB6919-4147-41D2-8237-888729AF7CC5}" dt="2026-05-28T07:33:18.650" v="324" actId="1076"/>
+          <ac:picMkLst>
+            <pc:docMk/>
+            <pc:sldMk cId="0" sldId="269"/>
+            <ac:picMk id="4" creationId="{9723A775-97D1-D34B-DB59-4F5826DF0311}"/>
+          </ac:picMkLst>
+        </pc:picChg>
+      </pc:sldChg>
+      <pc:sldChg chg="addSp delSp modSp mod ord setBg">
+        <pc:chgData name="Sutar, Monal Gajanan (Cognizant)" userId="cbef091d-1278-48f6-97ae-0b476c410a24" providerId="ADAL" clId="{69AB6919-4147-41D2-8237-888729AF7CC5}" dt="2026-05-26T06:57:40.186" v="249" actId="20577"/>
         <pc:sldMkLst>
           <pc:docMk/>
           <pc:sldMk cId="0" sldId="270"/>
         </pc:sldMkLst>
         <pc:spChg chg="mod">
-          <ac:chgData name="Sutar, Monal Gajanan (Cognizant)" userId="cbef091d-1278-48f6-97ae-0b476c410a24" providerId="ADAL" clId="{69AB6919-4147-41D2-8237-888729AF7CC5}" dt="2026-05-25T09:10:05.997" v="3" actId="26606"/>
+          <ac:chgData name="Sutar, Monal Gajanan (Cognizant)" userId="cbef091d-1278-48f6-97ae-0b476c410a24" providerId="ADAL" clId="{69AB6919-4147-41D2-8237-888729AF7CC5}" dt="2026-05-26T06:57:40.186" v="249" actId="20577"/>
           <ac:spMkLst>
             <pc:docMk/>
             <pc:sldMk cId="0" sldId="270"/>
@@ -220,7 +275,7 @@
           </ac:spMkLst>
         </pc:spChg>
         <pc:spChg chg="mod">
-          <ac:chgData name="Sutar, Monal Gajanan (Cognizant)" userId="cbef091d-1278-48f6-97ae-0b476c410a24" providerId="ADAL" clId="{69AB6919-4147-41D2-8237-888729AF7CC5}" dt="2026-05-25T09:10:05.997" v="3" actId="26606"/>
+          <ac:chgData name="Sutar, Monal Gajanan (Cognizant)" userId="cbef091d-1278-48f6-97ae-0b476c410a24" providerId="ADAL" clId="{69AB6919-4147-41D2-8237-888729AF7CC5}" dt="2026-05-26T06:25:29.528" v="175" actId="20577"/>
           <ac:spMkLst>
             <pc:docMk/>
             <pc:sldMk cId="0" sldId="270"/>
@@ -274,36 +329,12 @@
             <ac:spMk id="2" creationId="{00000000-0000-0000-0000-000000000000}"/>
           </ac:spMkLst>
         </pc:spChg>
-        <pc:spChg chg="add del">
-          <ac:chgData name="Sutar, Monal Gajanan (Cognizant)" userId="cbef091d-1278-48f6-97ae-0b476c410a24" providerId="ADAL" clId="{69AB6919-4147-41D2-8237-888729AF7CC5}" dt="2026-05-25T09:09:48.083" v="2" actId="26606"/>
-          <ac:spMkLst>
-            <pc:docMk/>
-            <pc:sldMk cId="0" sldId="271"/>
-            <ac:spMk id="3" creationId="{00000000-0000-0000-0000-000000000000}"/>
-          </ac:spMkLst>
-        </pc:spChg>
         <pc:spChg chg="add">
           <ac:chgData name="Sutar, Monal Gajanan (Cognizant)" userId="cbef091d-1278-48f6-97ae-0b476c410a24" providerId="ADAL" clId="{69AB6919-4147-41D2-8237-888729AF7CC5}" dt="2026-05-25T09:09:48.083" v="2" actId="26606"/>
           <ac:spMkLst>
             <pc:docMk/>
             <pc:sldMk cId="0" sldId="271"/>
             <ac:spMk id="6" creationId="{56E9B3E6-E277-4D68-BA48-9CB43FFBD6E2}"/>
-          </ac:spMkLst>
-        </pc:spChg>
-        <pc:spChg chg="add del">
-          <ac:chgData name="Sutar, Monal Gajanan (Cognizant)" userId="cbef091d-1278-48f6-97ae-0b476c410a24" providerId="ADAL" clId="{69AB6919-4147-41D2-8237-888729AF7CC5}" dt="2026-05-25T09:09:45.780" v="1" actId="26606"/>
-          <ac:spMkLst>
-            <pc:docMk/>
-            <pc:sldMk cId="0" sldId="271"/>
-            <ac:spMk id="9" creationId="{56E9B3E6-E277-4D68-BA48-9CB43FFBD6E2}"/>
-          </ac:spMkLst>
-        </pc:spChg>
-        <pc:spChg chg="add del">
-          <ac:chgData name="Sutar, Monal Gajanan (Cognizant)" userId="cbef091d-1278-48f6-97ae-0b476c410a24" providerId="ADAL" clId="{69AB6919-4147-41D2-8237-888729AF7CC5}" dt="2026-05-25T09:09:45.780" v="1" actId="26606"/>
-          <ac:spMkLst>
-            <pc:docMk/>
-            <pc:sldMk cId="0" sldId="271"/>
-            <ac:spMk id="16" creationId="{D5B0017B-2ECA-49AF-B397-DC140825DF8D}"/>
           </ac:spMkLst>
         </pc:spChg>
         <pc:spChg chg="add">
@@ -322,22 +353,6 @@
             <ac:grpSpMk id="7" creationId="{AE1C45F0-260A-458C-96ED-C1F6D2151219}"/>
           </ac:grpSpMkLst>
         </pc:grpChg>
-        <pc:grpChg chg="add del">
-          <ac:chgData name="Sutar, Monal Gajanan (Cognizant)" userId="cbef091d-1278-48f6-97ae-0b476c410a24" providerId="ADAL" clId="{69AB6919-4147-41D2-8237-888729AF7CC5}" dt="2026-05-25T09:09:45.780" v="1" actId="26606"/>
-          <ac:grpSpMkLst>
-            <pc:docMk/>
-            <pc:sldMk cId="0" sldId="271"/>
-            <ac:grpSpMk id="11" creationId="{AE1C45F0-260A-458C-96ED-C1F6D2151219}"/>
-          </ac:grpSpMkLst>
-        </pc:grpChg>
-        <pc:graphicFrameChg chg="add del">
-          <ac:chgData name="Sutar, Monal Gajanan (Cognizant)" userId="cbef091d-1278-48f6-97ae-0b476c410a24" providerId="ADAL" clId="{69AB6919-4147-41D2-8237-888729AF7CC5}" dt="2026-05-25T09:09:45.780" v="1" actId="26606"/>
-          <ac:graphicFrameMkLst>
-            <pc:docMk/>
-            <pc:sldMk cId="0" sldId="271"/>
-            <ac:graphicFrameMk id="5" creationId="{66214017-518F-A868-C3A8-110886B63067}"/>
-          </ac:graphicFrameMkLst>
-        </pc:graphicFrameChg>
         <pc:graphicFrameChg chg="add">
           <ac:chgData name="Sutar, Monal Gajanan (Cognizant)" userId="cbef091d-1278-48f6-97ae-0b476c410a24" providerId="ADAL" clId="{69AB6919-4147-41D2-8237-888729AF7CC5}" dt="2026-05-25T09:09:48.083" v="2" actId="26606"/>
           <ac:graphicFrameMkLst>
@@ -346,14 +361,6 @@
             <ac:graphicFrameMk id="20" creationId="{66214017-518F-A868-C3A8-110886B63067}"/>
           </ac:graphicFrameMkLst>
         </pc:graphicFrameChg>
-        <pc:cxnChg chg="add del">
-          <ac:chgData name="Sutar, Monal Gajanan (Cognizant)" userId="cbef091d-1278-48f6-97ae-0b476c410a24" providerId="ADAL" clId="{69AB6919-4147-41D2-8237-888729AF7CC5}" dt="2026-05-25T09:09:45.780" v="1" actId="26606"/>
-          <ac:cxnSpMkLst>
-            <pc:docMk/>
-            <pc:sldMk cId="0" sldId="271"/>
-            <ac:cxnSpMk id="18" creationId="{6CF1BAF6-AD41-4082-B212-8A1F9A2E8779}"/>
-          </ac:cxnSpMkLst>
-        </pc:cxnChg>
         <pc:cxnChg chg="add">
           <ac:chgData name="Sutar, Monal Gajanan (Cognizant)" userId="cbef091d-1278-48f6-97ae-0b476c410a24" providerId="ADAL" clId="{69AB6919-4147-41D2-8237-888729AF7CC5}" dt="2026-05-25T09:09:48.083" v="2" actId="26606"/>
           <ac:cxnSpMkLst>
@@ -362,6 +369,116 @@
             <ac:cxnSpMk id="19" creationId="{6CF1BAF6-AD41-4082-B212-8A1F9A2E8779}"/>
           </ac:cxnSpMkLst>
         </pc:cxnChg>
+      </pc:sldChg>
+      <pc:sldChg chg="addSp modSp mod setBg">
+        <pc:chgData name="Sutar, Monal Gajanan (Cognizant)" userId="cbef091d-1278-48f6-97ae-0b476c410a24" providerId="ADAL" clId="{69AB6919-4147-41D2-8237-888729AF7CC5}" dt="2026-05-26T06:56:03.333" v="233" actId="26606"/>
+        <pc:sldMkLst>
+          <pc:docMk/>
+          <pc:sldMk cId="0" sldId="274"/>
+        </pc:sldMkLst>
+        <pc:spChg chg="mod">
+          <ac:chgData name="Sutar, Monal Gajanan (Cognizant)" userId="cbef091d-1278-48f6-97ae-0b476c410a24" providerId="ADAL" clId="{69AB6919-4147-41D2-8237-888729AF7CC5}" dt="2026-05-26T06:56:03.333" v="233" actId="26606"/>
+          <ac:spMkLst>
+            <pc:docMk/>
+            <pc:sldMk cId="0" sldId="274"/>
+            <ac:spMk id="2" creationId="{00000000-0000-0000-0000-000000000000}"/>
+          </ac:spMkLst>
+        </pc:spChg>
+        <pc:spChg chg="add">
+          <ac:chgData name="Sutar, Monal Gajanan (Cognizant)" userId="cbef091d-1278-48f6-97ae-0b476c410a24" providerId="ADAL" clId="{69AB6919-4147-41D2-8237-888729AF7CC5}" dt="2026-05-26T06:56:03.333" v="233" actId="26606"/>
+          <ac:spMkLst>
+            <pc:docMk/>
+            <pc:sldMk cId="0" sldId="274"/>
+            <ac:spMk id="7" creationId="{5463EB0A-3D7C-4AA5-BFA5-8EE5B4BA5624}"/>
+          </ac:spMkLst>
+        </pc:spChg>
+        <pc:spChg chg="add">
+          <ac:chgData name="Sutar, Monal Gajanan (Cognizant)" userId="cbef091d-1278-48f6-97ae-0b476c410a24" providerId="ADAL" clId="{69AB6919-4147-41D2-8237-888729AF7CC5}" dt="2026-05-26T06:56:03.333" v="233" actId="26606"/>
+          <ac:spMkLst>
+            <pc:docMk/>
+            <pc:sldMk cId="0" sldId="274"/>
+            <ac:spMk id="9" creationId="{7945AD00-F967-454D-A4B2-39ABA5C88C20}"/>
+          </ac:spMkLst>
+        </pc:spChg>
+        <pc:spChg chg="add">
+          <ac:chgData name="Sutar, Monal Gajanan (Cognizant)" userId="cbef091d-1278-48f6-97ae-0b476c410a24" providerId="ADAL" clId="{69AB6919-4147-41D2-8237-888729AF7CC5}" dt="2026-05-26T06:56:03.333" v="233" actId="26606"/>
+          <ac:spMkLst>
+            <pc:docMk/>
+            <pc:sldMk cId="0" sldId="274"/>
+            <ac:spMk id="11" creationId="{E9BC5B79-B912-427C-8219-E3E50943FCDE}"/>
+          </ac:spMkLst>
+        </pc:spChg>
+      </pc:sldChg>
+      <pc:sldChg chg="addSp delSp modSp mod setBg">
+        <pc:chgData name="Sutar, Monal Gajanan (Cognizant)" userId="cbef091d-1278-48f6-97ae-0b476c410a24" providerId="ADAL" clId="{69AB6919-4147-41D2-8237-888729AF7CC5}" dt="2026-05-28T09:20:07.636" v="374" actId="2710"/>
+        <pc:sldMkLst>
+          <pc:docMk/>
+          <pc:sldMk cId="2079048099" sldId="285"/>
+        </pc:sldMkLst>
+        <pc:spChg chg="add mod ord">
+          <ac:chgData name="Sutar, Monal Gajanan (Cognizant)" userId="cbef091d-1278-48f6-97ae-0b476c410a24" providerId="ADAL" clId="{69AB6919-4147-41D2-8237-888729AF7CC5}" dt="2026-05-28T09:20:07.636" v="374" actId="2710"/>
+          <ac:spMkLst>
+            <pc:docMk/>
+            <pc:sldMk cId="2079048099" sldId="285"/>
+            <ac:spMk id="3" creationId="{16D033A1-0FFF-D9DE-29F0-08A9D60819F5}"/>
+          </ac:spMkLst>
+        </pc:spChg>
+        <pc:spChg chg="mod">
+          <ac:chgData name="Sutar, Monal Gajanan (Cognizant)" userId="cbef091d-1278-48f6-97ae-0b476c410a24" providerId="ADAL" clId="{69AB6919-4147-41D2-8237-888729AF7CC5}" dt="2026-05-28T09:19:44.676" v="370" actId="26606"/>
+          <ac:spMkLst>
+            <pc:docMk/>
+            <pc:sldMk cId="2079048099" sldId="285"/>
+            <ac:spMk id="4" creationId="{D3B87166-CABA-29D4-A2B0-EF358B28C651}"/>
+          </ac:spMkLst>
+        </pc:spChg>
+        <pc:spChg chg="mod">
+          <ac:chgData name="Sutar, Monal Gajanan (Cognizant)" userId="cbef091d-1278-48f6-97ae-0b476c410a24" providerId="ADAL" clId="{69AB6919-4147-41D2-8237-888729AF7CC5}" dt="2026-05-28T09:19:44.676" v="370" actId="26606"/>
+          <ac:spMkLst>
+            <pc:docMk/>
+            <pc:sldMk cId="2079048099" sldId="285"/>
+            <ac:spMk id="5" creationId="{4BCE4AEF-BF28-2C25-669D-7AC7205BA175}"/>
+          </ac:spMkLst>
+        </pc:spChg>
+        <pc:spChg chg="mod">
+          <ac:chgData name="Sutar, Monal Gajanan (Cognizant)" userId="cbef091d-1278-48f6-97ae-0b476c410a24" providerId="ADAL" clId="{69AB6919-4147-41D2-8237-888729AF7CC5}" dt="2026-05-28T09:19:44.676" v="370" actId="26606"/>
+          <ac:spMkLst>
+            <pc:docMk/>
+            <pc:sldMk cId="2079048099" sldId="285"/>
+            <ac:spMk id="6" creationId="{C45D4287-C6C6-DE9A-363F-8FC253A091BA}"/>
+          </ac:spMkLst>
+        </pc:spChg>
+        <pc:spChg chg="add del">
+          <ac:chgData name="Sutar, Monal Gajanan (Cognizant)" userId="cbef091d-1278-48f6-97ae-0b476c410a24" providerId="ADAL" clId="{69AB6919-4147-41D2-8237-888729AF7CC5}" dt="2026-05-28T09:19:44.676" v="370" actId="26606"/>
+          <ac:spMkLst>
+            <pc:docMk/>
+            <pc:sldMk cId="2079048099" sldId="285"/>
+            <ac:spMk id="13" creationId="{0B9EE3F3-89B7-43C3-8651-C4C96830993D}"/>
+          </ac:spMkLst>
+        </pc:spChg>
+        <pc:spChg chg="add del">
+          <ac:chgData name="Sutar, Monal Gajanan (Cognizant)" userId="cbef091d-1278-48f6-97ae-0b476c410a24" providerId="ADAL" clId="{69AB6919-4147-41D2-8237-888729AF7CC5}" dt="2026-05-28T09:19:44.676" v="370" actId="26606"/>
+          <ac:spMkLst>
+            <pc:docMk/>
+            <pc:sldMk cId="2079048099" sldId="285"/>
+            <ac:spMk id="15" creationId="{33AE4636-AEEC-45D6-84D4-7AC2DA48ECF8}"/>
+          </ac:spMkLst>
+        </pc:spChg>
+        <pc:spChg chg="add del">
+          <ac:chgData name="Sutar, Monal Gajanan (Cognizant)" userId="cbef091d-1278-48f6-97ae-0b476c410a24" providerId="ADAL" clId="{69AB6919-4147-41D2-8237-888729AF7CC5}" dt="2026-05-28T09:19:44.676" v="370" actId="26606"/>
+          <ac:spMkLst>
+            <pc:docMk/>
+            <pc:sldMk cId="2079048099" sldId="285"/>
+            <ac:spMk id="17" creationId="{8D9CE0F4-2EB2-4F1F-8AAC-DB3571D9FE10}"/>
+          </ac:spMkLst>
+        </pc:spChg>
+        <pc:picChg chg="mod ord">
+          <ac:chgData name="Sutar, Monal Gajanan (Cognizant)" userId="cbef091d-1278-48f6-97ae-0b476c410a24" providerId="ADAL" clId="{69AB6919-4147-41D2-8237-888729AF7CC5}" dt="2026-05-28T09:19:51.959" v="372" actId="1076"/>
+          <ac:picMkLst>
+            <pc:docMk/>
+            <pc:sldMk cId="2079048099" sldId="285"/>
+            <ac:picMk id="8" creationId="{947EAF7B-AD6D-6214-4CF9-586168B8C2A7}"/>
+          </ac:picMkLst>
+        </pc:picChg>
       </pc:sldChg>
       <pc:sldChg chg="modSp mod">
         <pc:chgData name="Sutar, Monal Gajanan (Cognizant)" userId="cbef091d-1278-48f6-97ae-0b476c410a24" providerId="ADAL" clId="{69AB6919-4147-41D2-8237-888729AF7CC5}" dt="2026-05-25T09:10:25.493" v="5" actId="1076"/>
@@ -378,14 +495,30 @@
           </ac:picMkLst>
         </pc:picChg>
       </pc:sldChg>
-      <pc:sldChg chg="modSp mod">
-        <pc:chgData name="Sutar, Monal Gajanan (Cognizant)" userId="cbef091d-1278-48f6-97ae-0b476c410a24" providerId="ADAL" clId="{69AB6919-4147-41D2-8237-888729AF7CC5}" dt="2026-05-25T09:10:53.568" v="11" actId="1076"/>
+      <pc:sldChg chg="addSp delSp modSp mod">
+        <pc:chgData name="Sutar, Monal Gajanan (Cognizant)" userId="cbef091d-1278-48f6-97ae-0b476c410a24" providerId="ADAL" clId="{69AB6919-4147-41D2-8237-888729AF7CC5}" dt="2026-05-28T07:35:28.136" v="340" actId="1076"/>
         <pc:sldMkLst>
           <pc:docMk/>
           <pc:sldMk cId="167173939" sldId="288"/>
         </pc:sldMkLst>
+        <pc:spChg chg="add mod">
+          <ac:chgData name="Sutar, Monal Gajanan (Cognizant)" userId="cbef091d-1278-48f6-97ae-0b476c410a24" providerId="ADAL" clId="{69AB6919-4147-41D2-8237-888729AF7CC5}" dt="2026-05-28T07:35:28.136" v="340" actId="1076"/>
+          <ac:spMkLst>
+            <pc:docMk/>
+            <pc:sldMk cId="167173939" sldId="288"/>
+            <ac:spMk id="8" creationId="{F5DF771E-1BD2-9E5E-62A7-CF705F6A455D}"/>
+          </ac:spMkLst>
+        </pc:spChg>
+        <pc:graphicFrameChg chg="add del mod modGraphic">
+          <ac:chgData name="Sutar, Monal Gajanan (Cognizant)" userId="cbef091d-1278-48f6-97ae-0b476c410a24" providerId="ADAL" clId="{69AB6919-4147-41D2-8237-888729AF7CC5}" dt="2026-05-28T07:34:26.791" v="329" actId="478"/>
+          <ac:graphicFrameMkLst>
+            <pc:docMk/>
+            <pc:sldMk cId="167173939" sldId="288"/>
+            <ac:graphicFrameMk id="2" creationId="{49CC067B-CB5F-AD4F-EB65-780BB06FCB60}"/>
+          </ac:graphicFrameMkLst>
+        </pc:graphicFrameChg>
         <pc:picChg chg="mod modCrop">
-          <ac:chgData name="Sutar, Monal Gajanan (Cognizant)" userId="cbef091d-1278-48f6-97ae-0b476c410a24" providerId="ADAL" clId="{69AB6919-4147-41D2-8237-888729AF7CC5}" dt="2026-05-25T09:10:53.568" v="11" actId="1076"/>
+          <ac:chgData name="Sutar, Monal Gajanan (Cognizant)" userId="cbef091d-1278-48f6-97ae-0b476c410a24" providerId="ADAL" clId="{69AB6919-4147-41D2-8237-888729AF7CC5}" dt="2026-05-28T07:35:21.280" v="339" actId="14100"/>
           <ac:picMkLst>
             <pc:docMk/>
             <pc:sldMk cId="167173939" sldId="288"/>
@@ -407,78 +540,6 @@
             <ac:spMk id="2" creationId="{87C29F85-2225-FDE7-A9F7-3D9DC9C72F19}"/>
           </ac:spMkLst>
         </pc:spChg>
-        <pc:spChg chg="add del">
-          <ac:chgData name="Sutar, Monal Gajanan (Cognizant)" userId="cbef091d-1278-48f6-97ae-0b476c410a24" providerId="ADAL" clId="{69AB6919-4147-41D2-8237-888729AF7CC5}" dt="2026-05-25T09:19:23.031" v="16"/>
-          <ac:spMkLst>
-            <pc:docMk/>
-            <pc:sldMk cId="2066007216" sldId="289"/>
-            <ac:spMk id="3" creationId="{62327CF2-09EE-9EAD-4A28-5ADA20713109}"/>
-          </ac:spMkLst>
-        </pc:spChg>
-        <pc:spChg chg="add del mod">
-          <ac:chgData name="Sutar, Monal Gajanan (Cognizant)" userId="cbef091d-1278-48f6-97ae-0b476c410a24" providerId="ADAL" clId="{69AB6919-4147-41D2-8237-888729AF7CC5}" dt="2026-05-25T09:19:57.395" v="24"/>
-          <ac:spMkLst>
-            <pc:docMk/>
-            <pc:sldMk cId="2066007216" sldId="289"/>
-            <ac:spMk id="7" creationId="{78975115-2709-C40E-2829-9CD759C76349}"/>
-          </ac:spMkLst>
-        </pc:spChg>
-        <pc:spChg chg="add del mod">
-          <ac:chgData name="Sutar, Monal Gajanan (Cognizant)" userId="cbef091d-1278-48f6-97ae-0b476c410a24" providerId="ADAL" clId="{69AB6919-4147-41D2-8237-888729AF7CC5}" dt="2026-05-25T09:20:57.644" v="33" actId="26606"/>
-          <ac:spMkLst>
-            <pc:docMk/>
-            <pc:sldMk cId="2066007216" sldId="289"/>
-            <ac:spMk id="10" creationId="{698EB4D3-1BEE-0416-14B9-8645FC09B1A6}"/>
-          </ac:spMkLst>
-        </pc:spChg>
-        <pc:spChg chg="add del">
-          <ac:chgData name="Sutar, Monal Gajanan (Cognizant)" userId="cbef091d-1278-48f6-97ae-0b476c410a24" providerId="ADAL" clId="{69AB6919-4147-41D2-8237-888729AF7CC5}" dt="2026-05-25T09:20:57.614" v="32" actId="26606"/>
-          <ac:spMkLst>
-            <pc:docMk/>
-            <pc:sldMk cId="2066007216" sldId="289"/>
-            <ac:spMk id="16" creationId="{2E442304-DDBD-4F7B-8017-36BCC863FB40}"/>
-          </ac:spMkLst>
-        </pc:spChg>
-        <pc:spChg chg="add del">
-          <ac:chgData name="Sutar, Monal Gajanan (Cognizant)" userId="cbef091d-1278-48f6-97ae-0b476c410a24" providerId="ADAL" clId="{69AB6919-4147-41D2-8237-888729AF7CC5}" dt="2026-05-25T09:20:57.614" v="32" actId="26606"/>
-          <ac:spMkLst>
-            <pc:docMk/>
-            <pc:sldMk cId="2066007216" sldId="289"/>
-            <ac:spMk id="18" creationId="{5E107275-3853-46FD-A241-DE4355A42675}"/>
-          </ac:spMkLst>
-        </pc:spChg>
-        <pc:graphicFrameChg chg="add mod">
-          <ac:chgData name="Sutar, Monal Gajanan (Cognizant)" userId="cbef091d-1278-48f6-97ae-0b476c410a24" providerId="ADAL" clId="{69AB6919-4147-41D2-8237-888729AF7CC5}" dt="2026-05-25T09:19:20.556" v="15"/>
-          <ac:graphicFrameMkLst>
-            <pc:docMk/>
-            <pc:sldMk cId="2066007216" sldId="289"/>
-            <ac:graphicFrameMk id="4" creationId="{F8BFFFDD-9617-F10D-DE8E-393D3BC10C76}"/>
-          </ac:graphicFrameMkLst>
-        </pc:graphicFrameChg>
-        <pc:graphicFrameChg chg="add del mod">
-          <ac:chgData name="Sutar, Monal Gajanan (Cognizant)" userId="cbef091d-1278-48f6-97ae-0b476c410a24" providerId="ADAL" clId="{69AB6919-4147-41D2-8237-888729AF7CC5}" dt="2026-05-25T09:19:54.965" v="23" actId="478"/>
-          <ac:graphicFrameMkLst>
-            <pc:docMk/>
-            <pc:sldMk cId="2066007216" sldId="289"/>
-            <ac:graphicFrameMk id="5" creationId="{A4FE8AB8-4027-A2B3-99BF-05A5D21EA88C}"/>
-          </ac:graphicFrameMkLst>
-        </pc:graphicFrameChg>
-        <pc:graphicFrameChg chg="add del mod modGraphic">
-          <ac:chgData name="Sutar, Monal Gajanan (Cognizant)" userId="cbef091d-1278-48f6-97ae-0b476c410a24" providerId="ADAL" clId="{69AB6919-4147-41D2-8237-888729AF7CC5}" dt="2026-05-25T09:20:36.220" v="29" actId="478"/>
-          <ac:graphicFrameMkLst>
-            <pc:docMk/>
-            <pc:sldMk cId="2066007216" sldId="289"/>
-            <ac:graphicFrameMk id="8" creationId="{9EF9B03D-9CA0-6463-A431-EADD91046729}"/>
-          </ac:graphicFrameMkLst>
-        </pc:graphicFrameChg>
-        <pc:graphicFrameChg chg="add del">
-          <ac:chgData name="Sutar, Monal Gajanan (Cognizant)" userId="cbef091d-1278-48f6-97ae-0b476c410a24" providerId="ADAL" clId="{69AB6919-4147-41D2-8237-888729AF7CC5}" dt="2026-05-25T09:20:57.614" v="32" actId="26606"/>
-          <ac:graphicFrameMkLst>
-            <pc:docMk/>
-            <pc:sldMk cId="2066007216" sldId="289"/>
-            <ac:graphicFrameMk id="12" creationId="{4BB63833-E1D7-975E-6283-0ECBC987C7CA}"/>
-          </ac:graphicFrameMkLst>
-        </pc:graphicFrameChg>
         <pc:graphicFrameChg chg="add modGraphic">
           <ac:chgData name="Sutar, Monal Gajanan (Cognizant)" userId="cbef091d-1278-48f6-97ae-0b476c410a24" providerId="ADAL" clId="{69AB6919-4147-41D2-8237-888729AF7CC5}" dt="2026-05-25T09:21:13.303" v="35" actId="404"/>
           <ac:graphicFrameMkLst>
@@ -502,14 +563,6 @@
             <ac:spMk id="2" creationId="{FBEC718A-A960-73A4-BBF2-8C1F40C572DB}"/>
           </ac:spMkLst>
         </pc:spChg>
-        <pc:spChg chg="del">
-          <ac:chgData name="Sutar, Monal Gajanan (Cognizant)" userId="cbef091d-1278-48f6-97ae-0b476c410a24" providerId="ADAL" clId="{69AB6919-4147-41D2-8237-888729AF7CC5}" dt="2026-05-25T09:28:30.209" v="37"/>
-          <ac:spMkLst>
-            <pc:docMk/>
-            <pc:sldMk cId="3113910409" sldId="290"/>
-            <ac:spMk id="3" creationId="{D21AF011-6ECA-A68C-8F89-3FA78582EDE0}"/>
-          </ac:spMkLst>
-        </pc:spChg>
         <pc:spChg chg="add mod">
           <ac:chgData name="Sutar, Monal Gajanan (Cognizant)" userId="cbef091d-1278-48f6-97ae-0b476c410a24" providerId="ADAL" clId="{69AB6919-4147-41D2-8237-888729AF7CC5}" dt="2026-05-25T09:42:52.944" v="155" actId="20577"/>
           <ac:spMkLst>
@@ -518,46 +571,6 @@
             <ac:spMk id="6" creationId="{043F25F9-9DE4-4622-B036-547F460C43A0}"/>
           </ac:spMkLst>
         </pc:spChg>
-        <pc:graphicFrameChg chg="add del mod">
-          <ac:chgData name="Sutar, Monal Gajanan (Cognizant)" userId="cbef091d-1278-48f6-97ae-0b476c410a24" providerId="ADAL" clId="{69AB6919-4147-41D2-8237-888729AF7CC5}" dt="2026-05-25T09:28:36.992" v="39" actId="478"/>
-          <ac:graphicFrameMkLst>
-            <pc:docMk/>
-            <pc:sldMk cId="3113910409" sldId="290"/>
-            <ac:graphicFrameMk id="4" creationId="{BB83A904-6052-9156-1226-B8558D68F555}"/>
-          </ac:graphicFrameMkLst>
-        </pc:graphicFrameChg>
-        <pc:graphicFrameChg chg="add mod">
-          <ac:chgData name="Sutar, Monal Gajanan (Cognizant)" userId="cbef091d-1278-48f6-97ae-0b476c410a24" providerId="ADAL" clId="{69AB6919-4147-41D2-8237-888729AF7CC5}" dt="2026-05-25T09:29:10.926" v="47"/>
-          <ac:graphicFrameMkLst>
-            <pc:docMk/>
-            <pc:sldMk cId="3113910409" sldId="290"/>
-            <ac:graphicFrameMk id="7" creationId="{C4E7ADF1-DED9-44E3-7167-C3A837810EEF}"/>
-          </ac:graphicFrameMkLst>
-        </pc:graphicFrameChg>
-        <pc:graphicFrameChg chg="add mod">
-          <ac:chgData name="Sutar, Monal Gajanan (Cognizant)" userId="cbef091d-1278-48f6-97ae-0b476c410a24" providerId="ADAL" clId="{69AB6919-4147-41D2-8237-888729AF7CC5}" dt="2026-05-25T09:29:14.361" v="48"/>
-          <ac:graphicFrameMkLst>
-            <pc:docMk/>
-            <pc:sldMk cId="3113910409" sldId="290"/>
-            <ac:graphicFrameMk id="8" creationId="{EED435B6-8293-1BA0-8490-1812C817DB91}"/>
-          </ac:graphicFrameMkLst>
-        </pc:graphicFrameChg>
-        <pc:graphicFrameChg chg="add mod">
-          <ac:chgData name="Sutar, Monal Gajanan (Cognizant)" userId="cbef091d-1278-48f6-97ae-0b476c410a24" providerId="ADAL" clId="{69AB6919-4147-41D2-8237-888729AF7CC5}" dt="2026-05-25T09:29:18.801" v="51"/>
-          <ac:graphicFrameMkLst>
-            <pc:docMk/>
-            <pc:sldMk cId="3113910409" sldId="290"/>
-            <ac:graphicFrameMk id="9" creationId="{53F04AFE-02E6-890C-860C-E52EA97DF62C}"/>
-          </ac:graphicFrameMkLst>
-        </pc:graphicFrameChg>
-        <pc:graphicFrameChg chg="add del mod">
-          <ac:chgData name="Sutar, Monal Gajanan (Cognizant)" userId="cbef091d-1278-48f6-97ae-0b476c410a24" providerId="ADAL" clId="{69AB6919-4147-41D2-8237-888729AF7CC5}" dt="2026-05-25T09:29:31.893" v="56" actId="478"/>
-          <ac:graphicFrameMkLst>
-            <pc:docMk/>
-            <pc:sldMk cId="3113910409" sldId="290"/>
-            <ac:graphicFrameMk id="10" creationId="{CFDB1C9B-DC6D-E3C7-903F-FF846D3744A1}"/>
-          </ac:graphicFrameMkLst>
-        </pc:graphicFrameChg>
       </pc:sldChg>
       <pc:sldChg chg="addSp delSp modSp new mod modClrScheme chgLayout">
         <pc:chgData name="Sutar, Monal Gajanan (Cognizant)" userId="cbef091d-1278-48f6-97ae-0b476c410a24" providerId="ADAL" clId="{69AB6919-4147-41D2-8237-888729AF7CC5}" dt="2026-05-25T09:42:31.967" v="154" actId="5793"/>
@@ -565,28 +578,12 @@
           <pc:docMk/>
           <pc:sldMk cId="379410628" sldId="291"/>
         </pc:sldMkLst>
-        <pc:spChg chg="add del mod">
-          <ac:chgData name="Sutar, Monal Gajanan (Cognizant)" userId="cbef091d-1278-48f6-97ae-0b476c410a24" providerId="ADAL" clId="{69AB6919-4147-41D2-8237-888729AF7CC5}" dt="2026-05-25T09:31:57.007" v="102" actId="478"/>
-          <ac:spMkLst>
-            <pc:docMk/>
-            <pc:sldMk cId="379410628" sldId="291"/>
-            <ac:spMk id="4" creationId="{03656A7F-F2D9-58FA-CB3E-24574D3E335A}"/>
-          </ac:spMkLst>
-        </pc:spChg>
         <pc:spChg chg="add mod ord">
           <ac:chgData name="Sutar, Monal Gajanan (Cognizant)" userId="cbef091d-1278-48f6-97ae-0b476c410a24" providerId="ADAL" clId="{69AB6919-4147-41D2-8237-888729AF7CC5}" dt="2026-05-25T09:38:37.167" v="135" actId="20577"/>
           <ac:spMkLst>
             <pc:docMk/>
             <pc:sldMk cId="379410628" sldId="291"/>
             <ac:spMk id="7" creationId="{8B8837ED-3832-9C53-44FA-9CCD3624038E}"/>
-          </ac:spMkLst>
-        </pc:spChg>
-        <pc:spChg chg="add del mod ord">
-          <ac:chgData name="Sutar, Monal Gajanan (Cognizant)" userId="cbef091d-1278-48f6-97ae-0b476c410a24" providerId="ADAL" clId="{69AB6919-4147-41D2-8237-888729AF7CC5}" dt="2026-05-25T09:38:08.140" v="107" actId="478"/>
-          <ac:spMkLst>
-            <pc:docMk/>
-            <pc:sldMk cId="379410628" sldId="291"/>
-            <ac:spMk id="8" creationId="{33545630-54C6-F8D0-D41D-2B16771E8E38}"/>
           </ac:spMkLst>
         </pc:spChg>
         <pc:spChg chg="add mod">
@@ -597,22 +594,6 @@
             <ac:spMk id="11" creationId="{551FCAF5-46D5-D21C-ABBA-72976EF8DEB1}"/>
           </ac:spMkLst>
         </pc:spChg>
-        <pc:graphicFrameChg chg="add del mod modGraphic">
-          <ac:chgData name="Sutar, Monal Gajanan (Cognizant)" userId="cbef091d-1278-48f6-97ae-0b476c410a24" providerId="ADAL" clId="{69AB6919-4147-41D2-8237-888729AF7CC5}" dt="2026-05-25T09:30:04.109" v="61" actId="478"/>
-          <ac:graphicFrameMkLst>
-            <pc:docMk/>
-            <pc:sldMk cId="379410628" sldId="291"/>
-            <ac:graphicFrameMk id="2" creationId="{50F00354-AE3F-7A6F-5800-F8D44E2DAC0E}"/>
-          </ac:graphicFrameMkLst>
-        </pc:graphicFrameChg>
-        <pc:graphicFrameChg chg="add del mod">
-          <ac:chgData name="Sutar, Monal Gajanan (Cognizant)" userId="cbef091d-1278-48f6-97ae-0b476c410a24" providerId="ADAL" clId="{69AB6919-4147-41D2-8237-888729AF7CC5}" dt="2026-05-25T09:39:56.013" v="138" actId="478"/>
-          <ac:graphicFrameMkLst>
-            <pc:docMk/>
-            <pc:sldMk cId="379410628" sldId="291"/>
-            <ac:graphicFrameMk id="9" creationId="{66CA5ECC-C879-C1FB-E821-E515D4E0D9F9}"/>
-          </ac:graphicFrameMkLst>
-        </pc:graphicFrameChg>
         <pc:picChg chg="add mod">
           <ac:chgData name="Sutar, Monal Gajanan (Cognizant)" userId="cbef091d-1278-48f6-97ae-0b476c410a24" providerId="ADAL" clId="{69AB6919-4147-41D2-8237-888729AF7CC5}" dt="2026-05-25T09:40:10.021" v="143" actId="1076"/>
           <ac:picMkLst>
@@ -621,6 +602,29 @@
             <ac:picMk id="6" creationId="{1EC5F9CE-E452-4863-FF49-DE1369B030E2}"/>
           </ac:picMkLst>
         </pc:picChg>
+      </pc:sldChg>
+      <pc:sldChg chg="addSp delSp modSp new mod">
+        <pc:chgData name="Sutar, Monal Gajanan (Cognizant)" userId="cbef091d-1278-48f6-97ae-0b476c410a24" providerId="ADAL" clId="{69AB6919-4147-41D2-8237-888729AF7CC5}" dt="2026-05-26T06:30:22.155" v="229" actId="404"/>
+        <pc:sldMkLst>
+          <pc:docMk/>
+          <pc:sldMk cId="1022896505" sldId="292"/>
+        </pc:sldMkLst>
+        <pc:spChg chg="mod">
+          <ac:chgData name="Sutar, Monal Gajanan (Cognizant)" userId="cbef091d-1278-48f6-97ae-0b476c410a24" providerId="ADAL" clId="{69AB6919-4147-41D2-8237-888729AF7CC5}" dt="2026-05-26T06:26:54.222" v="227" actId="20577"/>
+          <ac:spMkLst>
+            <pc:docMk/>
+            <pc:sldMk cId="1022896505" sldId="292"/>
+            <ac:spMk id="2" creationId="{C945870B-5D5D-99CF-7CCE-B14B54F2179A}"/>
+          </ac:spMkLst>
+        </pc:spChg>
+        <pc:spChg chg="add mod">
+          <ac:chgData name="Sutar, Monal Gajanan (Cognizant)" userId="cbef091d-1278-48f6-97ae-0b476c410a24" providerId="ADAL" clId="{69AB6919-4147-41D2-8237-888729AF7CC5}" dt="2026-05-26T06:30:22.155" v="229" actId="404"/>
+          <ac:spMkLst>
+            <pc:docMk/>
+            <pc:sldMk cId="1022896505" sldId="292"/>
+            <ac:spMk id="6" creationId="{2ECCC534-8B6E-FD10-77A2-749AF776BD4D}"/>
+          </ac:spMkLst>
+        </pc:spChg>
       </pc:sldChg>
     </pc:docChg>
   </pc:docChgLst>
@@ -3186,7 +3190,7 @@
             <a:defRPr cap="all"/>
           </a:pPr>
           <a:r>
-            <a:rPr lang="en-US"/>
+            <a:rPr lang="en-US" dirty="0"/>
             <a:t>Acts as backbone network</a:t>
           </a:r>
         </a:p>
@@ -4214,8 +4218,8 @@
       </dsp:nvSpPr>
       <dsp:spPr>
         <a:xfrm>
-          <a:off x="821904" y="812353"/>
-          <a:ext cx="1257517" cy="1257517"/>
+          <a:off x="250047" y="445605"/>
+          <a:ext cx="769886" cy="769886"/>
         </a:xfrm>
         <a:prstGeom prst="ellipse">
           <a:avLst/>
@@ -4253,8 +4257,8 @@
       </dsp:nvSpPr>
       <dsp:spPr>
         <a:xfrm>
-          <a:off x="1089899" y="1080348"/>
-          <a:ext cx="721526" cy="721526"/>
+          <a:off x="414122" y="609680"/>
+          <a:ext cx="441738" cy="441738"/>
         </a:xfrm>
         <a:prstGeom prst="rect">
           <a:avLst/>
@@ -4303,8 +4307,8 @@
       </dsp:nvSpPr>
       <dsp:spPr>
         <a:xfrm>
-          <a:off x="419911" y="2461556"/>
-          <a:ext cx="2061504" cy="720000"/>
+          <a:off x="3936" y="1455293"/>
+          <a:ext cx="1262109" cy="504843"/>
         </a:xfrm>
         <a:prstGeom prst="rect">
           <a:avLst/>
@@ -4333,7 +4337,7 @@
         </a:bodyPr>
         <a:lstStyle/>
         <a:p>
-          <a:pPr marL="0" lvl="0" indent="0" algn="ctr" defTabSz="755650">
+          <a:pPr marL="0" lvl="0" indent="0" algn="ctr" defTabSz="533400">
             <a:lnSpc>
               <a:spcPct val="90000"/>
             </a:lnSpc>
@@ -4347,14 +4351,14 @@
             <a:defRPr cap="all"/>
           </a:pPr>
           <a:r>
-            <a:rPr lang="en-US" sz="1700" kern="1200"/>
+            <a:rPr lang="en-US" sz="1200" kern="1200"/>
             <a:t>Very high speed network</a:t>
           </a:r>
         </a:p>
       </dsp:txBody>
       <dsp:txXfrm>
-        <a:off x="419911" y="2461556"/>
-        <a:ext cx="2061504" cy="720000"/>
+        <a:off x="3936" y="1455293"/>
+        <a:ext cx="1262109" cy="504843"/>
       </dsp:txXfrm>
     </dsp:sp>
     <dsp:sp modelId="{131E8150-748B-497F-AF9C-06037EDCFD34}">
@@ -4364,8 +4368,8 @@
       </dsp:nvSpPr>
       <dsp:spPr>
         <a:xfrm>
-          <a:off x="3244171" y="812353"/>
-          <a:ext cx="1257517" cy="1257517"/>
+          <a:off x="1733026" y="445605"/>
+          <a:ext cx="769886" cy="769886"/>
         </a:xfrm>
         <a:prstGeom prst="ellipse">
           <a:avLst/>
@@ -4403,8 +4407,8 @@
       </dsp:nvSpPr>
       <dsp:spPr>
         <a:xfrm>
-          <a:off x="3512167" y="1080348"/>
-          <a:ext cx="721526" cy="721526"/>
+          <a:off x="1897100" y="609680"/>
+          <a:ext cx="441738" cy="441738"/>
         </a:xfrm>
         <a:prstGeom prst="rect">
           <a:avLst/>
@@ -4453,8 +4457,8 @@
       </dsp:nvSpPr>
       <dsp:spPr>
         <a:xfrm>
-          <a:off x="2842178" y="2461556"/>
-          <a:ext cx="2061504" cy="720000"/>
+          <a:off x="1486915" y="1455293"/>
+          <a:ext cx="1262109" cy="504843"/>
         </a:xfrm>
         <a:prstGeom prst="rect">
           <a:avLst/>
@@ -4483,7 +4487,7 @@
         </a:bodyPr>
         <a:lstStyle/>
         <a:p>
-          <a:pPr marL="0" lvl="0" indent="0" algn="ctr" defTabSz="755650">
+          <a:pPr marL="0" lvl="0" indent="0" algn="ctr" defTabSz="533400">
             <a:lnSpc>
               <a:spcPct val="90000"/>
             </a:lnSpc>
@@ -4497,14 +4501,14 @@
             <a:defRPr cap="all"/>
           </a:pPr>
           <a:r>
-            <a:rPr lang="en-US" sz="1700" kern="1200"/>
+            <a:rPr lang="en-US" sz="1200" kern="1200"/>
             <a:t>Used in ADAS systems</a:t>
           </a:r>
         </a:p>
       </dsp:txBody>
       <dsp:txXfrm>
-        <a:off x="2842178" y="2461556"/>
-        <a:ext cx="2061504" cy="720000"/>
+        <a:off x="1486915" y="1455293"/>
+        <a:ext cx="1262109" cy="504843"/>
       </dsp:txXfrm>
     </dsp:sp>
     <dsp:sp modelId="{546E0368-546E-474E-9A2D-339F5DE8EAB9}">
@@ -4514,8 +4518,8 @@
       </dsp:nvSpPr>
       <dsp:spPr>
         <a:xfrm>
-          <a:off x="5666438" y="812353"/>
-          <a:ext cx="1257517" cy="1257517"/>
+          <a:off x="3216004" y="445605"/>
+          <a:ext cx="769886" cy="769886"/>
         </a:xfrm>
         <a:prstGeom prst="ellipse">
           <a:avLst/>
@@ -4553,8 +4557,8 @@
       </dsp:nvSpPr>
       <dsp:spPr>
         <a:xfrm>
-          <a:off x="5934434" y="1080348"/>
-          <a:ext cx="721526" cy="721526"/>
+          <a:off x="3380079" y="609680"/>
+          <a:ext cx="441738" cy="441738"/>
         </a:xfrm>
         <a:prstGeom prst="rect">
           <a:avLst/>
@@ -4603,8 +4607,8 @@
       </dsp:nvSpPr>
       <dsp:spPr>
         <a:xfrm>
-          <a:off x="5264445" y="2461556"/>
-          <a:ext cx="2061504" cy="720000"/>
+          <a:off x="2969893" y="1455293"/>
+          <a:ext cx="1262109" cy="504843"/>
         </a:xfrm>
         <a:prstGeom prst="rect">
           <a:avLst/>
@@ -4633,7 +4637,7 @@
         </a:bodyPr>
         <a:lstStyle/>
         <a:p>
-          <a:pPr marL="0" lvl="0" indent="0" algn="ctr" defTabSz="755650">
+          <a:pPr marL="0" lvl="0" indent="0" algn="ctr" defTabSz="533400">
             <a:lnSpc>
               <a:spcPct val="90000"/>
             </a:lnSpc>
@@ -4647,14 +4651,14 @@
             <a:defRPr cap="all"/>
           </a:pPr>
           <a:r>
-            <a:rPr lang="en-US" sz="1700" kern="1200"/>
+            <a:rPr lang="en-US" sz="1200" kern="1200"/>
             <a:t>Supports cameras &amp; sensors</a:t>
           </a:r>
         </a:p>
       </dsp:txBody>
       <dsp:txXfrm>
-        <a:off x="5264445" y="2461556"/>
-        <a:ext cx="2061504" cy="720000"/>
+        <a:off x="2969893" y="1455293"/>
+        <a:ext cx="1262109" cy="504843"/>
       </dsp:txXfrm>
     </dsp:sp>
     <dsp:sp modelId="{2FDA3C4B-AC7A-4070-A6EB-469CEEEB97D0}">
@@ -4664,8 +4668,8 @@
       </dsp:nvSpPr>
       <dsp:spPr>
         <a:xfrm>
-          <a:off x="8088706" y="812353"/>
-          <a:ext cx="1257517" cy="1257517"/>
+          <a:off x="4698983" y="445605"/>
+          <a:ext cx="769886" cy="769886"/>
         </a:xfrm>
         <a:prstGeom prst="ellipse">
           <a:avLst/>
@@ -4703,8 +4707,8 @@
       </dsp:nvSpPr>
       <dsp:spPr>
         <a:xfrm>
-          <a:off x="8356701" y="1080348"/>
-          <a:ext cx="721526" cy="721526"/>
+          <a:off x="4863057" y="609680"/>
+          <a:ext cx="441738" cy="441738"/>
         </a:xfrm>
         <a:prstGeom prst="rect">
           <a:avLst/>
@@ -4753,8 +4757,8 @@
       </dsp:nvSpPr>
       <dsp:spPr>
         <a:xfrm>
-          <a:off x="7686712" y="2461556"/>
-          <a:ext cx="2061504" cy="720000"/>
+          <a:off x="4452872" y="1455293"/>
+          <a:ext cx="1262109" cy="504843"/>
         </a:xfrm>
         <a:prstGeom prst="rect">
           <a:avLst/>
@@ -4783,7 +4787,7 @@
         </a:bodyPr>
         <a:lstStyle/>
         <a:p>
-          <a:pPr marL="0" lvl="0" indent="0" algn="ctr" defTabSz="755650">
+          <a:pPr marL="0" lvl="0" indent="0" algn="ctr" defTabSz="533400">
             <a:lnSpc>
               <a:spcPct val="90000"/>
             </a:lnSpc>
@@ -4797,14 +4801,14 @@
             <a:defRPr cap="all"/>
           </a:pPr>
           <a:r>
-            <a:rPr lang="en-US" sz="1700" kern="1200"/>
+            <a:rPr lang="en-US" sz="1200" kern="1200" dirty="0"/>
             <a:t>Acts as backbone network</a:t>
           </a:r>
         </a:p>
       </dsp:txBody>
       <dsp:txXfrm>
-        <a:off x="7686712" y="2461556"/>
-        <a:ext cx="2061504" cy="720000"/>
+        <a:off x="4452872" y="1455293"/>
+        <a:ext cx="1262109" cy="504843"/>
       </dsp:txXfrm>
     </dsp:sp>
   </dsp:spTree>
@@ -10039,7 +10043,7 @@
           <a:p>
             <a:fld id="{4C4E590E-379C-4726-BA99-B1D32340C5CF}" type="datetimeFigureOut">
               <a:rPr lang="en-IN" smtClean="0"/>
-              <a:t>25-05-2026</a:t>
+              <a:t>28-05-2026</a:t>
             </a:fld>
             <a:endParaRPr lang="en-IN"/>
           </a:p>
@@ -10239,7 +10243,7 @@
           <a:p>
             <a:fld id="{4C4E590E-379C-4726-BA99-B1D32340C5CF}" type="datetimeFigureOut">
               <a:rPr lang="en-IN" smtClean="0"/>
-              <a:t>25-05-2026</a:t>
+              <a:t>28-05-2026</a:t>
             </a:fld>
             <a:endParaRPr lang="en-IN"/>
           </a:p>
@@ -10449,7 +10453,7 @@
           <a:p>
             <a:fld id="{4C4E590E-379C-4726-BA99-B1D32340C5CF}" type="datetimeFigureOut">
               <a:rPr lang="en-IN" smtClean="0"/>
-              <a:t>25-05-2026</a:t>
+              <a:t>28-05-2026</a:t>
             </a:fld>
             <a:endParaRPr lang="en-IN"/>
           </a:p>
@@ -10649,7 +10653,7 @@
           <a:p>
             <a:fld id="{4C4E590E-379C-4726-BA99-B1D32340C5CF}" type="datetimeFigureOut">
               <a:rPr lang="en-IN" smtClean="0"/>
-              <a:t>25-05-2026</a:t>
+              <a:t>28-05-2026</a:t>
             </a:fld>
             <a:endParaRPr lang="en-IN"/>
           </a:p>
@@ -10925,7 +10929,7 @@
           <a:p>
             <a:fld id="{4C4E590E-379C-4726-BA99-B1D32340C5CF}" type="datetimeFigureOut">
               <a:rPr lang="en-IN" smtClean="0"/>
-              <a:t>25-05-2026</a:t>
+              <a:t>28-05-2026</a:t>
             </a:fld>
             <a:endParaRPr lang="en-IN"/>
           </a:p>
@@ -11193,7 +11197,7 @@
           <a:p>
             <a:fld id="{4C4E590E-379C-4726-BA99-B1D32340C5CF}" type="datetimeFigureOut">
               <a:rPr lang="en-IN" smtClean="0"/>
-              <a:t>25-05-2026</a:t>
+              <a:t>28-05-2026</a:t>
             </a:fld>
             <a:endParaRPr lang="en-IN"/>
           </a:p>
@@ -11608,7 +11612,7 @@
           <a:p>
             <a:fld id="{4C4E590E-379C-4726-BA99-B1D32340C5CF}" type="datetimeFigureOut">
               <a:rPr lang="en-IN" smtClean="0"/>
-              <a:t>25-05-2026</a:t>
+              <a:t>28-05-2026</a:t>
             </a:fld>
             <a:endParaRPr lang="en-IN"/>
           </a:p>
@@ -11750,7 +11754,7 @@
           <a:p>
             <a:fld id="{4C4E590E-379C-4726-BA99-B1D32340C5CF}" type="datetimeFigureOut">
               <a:rPr lang="en-IN" smtClean="0"/>
-              <a:t>25-05-2026</a:t>
+              <a:t>28-05-2026</a:t>
             </a:fld>
             <a:endParaRPr lang="en-IN"/>
           </a:p>
@@ -11863,7 +11867,7 @@
           <a:p>
             <a:fld id="{4C4E590E-379C-4726-BA99-B1D32340C5CF}" type="datetimeFigureOut">
               <a:rPr lang="en-IN" smtClean="0"/>
-              <a:t>25-05-2026</a:t>
+              <a:t>28-05-2026</a:t>
             </a:fld>
             <a:endParaRPr lang="en-IN"/>
           </a:p>
@@ -12176,7 +12180,7 @@
           <a:p>
             <a:fld id="{4C4E590E-379C-4726-BA99-B1D32340C5CF}" type="datetimeFigureOut">
               <a:rPr lang="en-IN" smtClean="0"/>
-              <a:t>25-05-2026</a:t>
+              <a:t>28-05-2026</a:t>
             </a:fld>
             <a:endParaRPr lang="en-IN"/>
           </a:p>
@@ -12465,7 +12469,7 @@
           <a:p>
             <a:fld id="{4C4E590E-379C-4726-BA99-B1D32340C5CF}" type="datetimeFigureOut">
               <a:rPr lang="en-IN" smtClean="0"/>
-              <a:t>25-05-2026</a:t>
+              <a:t>28-05-2026</a:t>
             </a:fld>
             <a:endParaRPr lang="en-IN"/>
           </a:p>
@@ -12708,7 +12712,7 @@
           <a:p>
             <a:fld id="{4C4E590E-379C-4726-BA99-B1D32340C5CF}" type="datetimeFigureOut">
               <a:rPr lang="en-IN" smtClean="0"/>
-              <a:t>25-05-2026</a:t>
+              <a:t>28-05-2026</a:t>
             </a:fld>
             <a:endParaRPr lang="en-IN"/>
           </a:p>
@@ -15104,14 +15108,14 @@
             <p:ph idx="1"/>
             <p:extLst>
               <p:ext uri="{D42A27DB-BD31-4B8C-83A1-F6EECF244321}">
-                <p14:modId xmlns:p14="http://schemas.microsoft.com/office/powerpoint/2010/main" val="710876370"/>
+                <p14:modId xmlns:p14="http://schemas.microsoft.com/office/powerpoint/2010/main" val="1609735927"/>
               </p:ext>
             </p:extLst>
           </p:nvPr>
         </p:nvGraphicFramePr>
         <p:xfrm>
-          <a:off x="1115568" y="2269730"/>
-          <a:ext cx="10168128" cy="3993910"/>
+          <a:off x="5874368" y="4256314"/>
+          <a:ext cx="5718918" cy="2405743"/>
         </p:xfrm>
         <a:graphic>
           <a:graphicData uri="http://schemas.openxmlformats.org/drawingml/2006/diagram">
@@ -15119,6 +15123,177 @@
           </a:graphicData>
         </a:graphic>
       </p:graphicFrame>
+      <p:sp>
+        <p:nvSpPr>
+          <p:cNvPr id="3" name="TextBox 2">
+            <a:extLst>
+              <a:ext uri="{FF2B5EF4-FFF2-40B4-BE49-F238E27FC236}">
+                <a16:creationId xmlns:a16="http://schemas.microsoft.com/office/drawing/2014/main" id="{1A405815-7771-39CD-20D1-D276DBD004AE}"/>
+              </a:ext>
+            </a:extLst>
+          </p:cNvPr>
+          <p:cNvSpPr txBox="1"/>
+          <p:nvPr/>
+        </p:nvSpPr>
+        <p:spPr>
+          <a:xfrm>
+            <a:off x="466344" y="2018806"/>
+            <a:ext cx="11409970" cy="4801314"/>
+          </a:xfrm>
+          <a:prstGeom prst="rect">
+            <a:avLst/>
+          </a:prstGeom>
+          <a:noFill/>
+        </p:spPr>
+        <p:txBody>
+          <a:bodyPr wrap="square" rtlCol="0">
+            <a:spAutoFit/>
+          </a:bodyPr>
+          <a:lstStyle/>
+          <a:p>
+            <a:r>
+              <a:rPr lang="en-IN" dirty="0"/>
+              <a:t>A </a:t>
+            </a:r>
+            <a:r>
+              <a:rPr lang="en-IN" b="1" dirty="0"/>
+              <a:t>high-speed communication network</a:t>
+            </a:r>
+            <a:r>
+              <a:rPr lang="en-IN" dirty="0"/>
+              <a:t> used in modern vehicles. It connects multiple ECUs for </a:t>
+            </a:r>
+            <a:r>
+              <a:rPr lang="en-IN" b="1" dirty="0"/>
+              <a:t>fast and reliable data transfer. </a:t>
+            </a:r>
+            <a:r>
+              <a:rPr lang="en-IN" dirty="0"/>
+              <a:t>Based on </a:t>
+            </a:r>
+            <a:r>
+              <a:rPr lang="en-IN" b="1" dirty="0"/>
+              <a:t>standard Ethernet technology (like computer networks)</a:t>
+            </a:r>
+            <a:endParaRPr lang="en-IN" dirty="0"/>
+          </a:p>
+          <a:p>
+            <a:endParaRPr lang="en-IN" dirty="0"/>
+          </a:p>
+          <a:p>
+            <a:r>
+              <a:rPr lang="en-IN" b="1" dirty="0"/>
+              <a:t>Why Automotive Ethernet is Needed</a:t>
+            </a:r>
+          </a:p>
+          <a:p>
+            <a:r>
+              <a:rPr lang="en-IN" dirty="0"/>
+              <a:t>Modern vehicles generate </a:t>
+            </a:r>
+            <a:r>
+              <a:rPr lang="en-IN" b="1" dirty="0"/>
+              <a:t>large amounts of data</a:t>
+            </a:r>
+            <a:endParaRPr lang="en-IN" dirty="0"/>
+          </a:p>
+          <a:p>
+            <a:r>
+              <a:rPr lang="en-IN" dirty="0"/>
+              <a:t>Required for:</a:t>
+            </a:r>
+          </a:p>
+          <a:p>
+            <a:pPr lvl="1"/>
+            <a:r>
+              <a:rPr lang="en-IN" b="1" dirty="0"/>
+              <a:t>Safety systems</a:t>
+            </a:r>
+            <a:r>
+              <a:rPr lang="en-IN" dirty="0"/>
+              <a:t> (ADAS, braking, sensors)</a:t>
+            </a:r>
+          </a:p>
+          <a:p>
+            <a:pPr lvl="1"/>
+            <a:r>
+              <a:rPr lang="en-IN" b="1" dirty="0"/>
+              <a:t>Infotainment</a:t>
+            </a:r>
+            <a:r>
+              <a:rPr lang="en-IN" dirty="0"/>
+              <a:t> (video, audio streaming)</a:t>
+            </a:r>
+          </a:p>
+          <a:p>
+            <a:pPr lvl="1"/>
+            <a:r>
+              <a:rPr lang="en-IN" b="1" dirty="0"/>
+              <a:t>Autonomous driving systems</a:t>
+            </a:r>
+            <a:endParaRPr lang="en-IN" dirty="0"/>
+          </a:p>
+          <a:p>
+            <a:r>
+              <a:rPr lang="en-IN" b="1" dirty="0"/>
+              <a:t>          high speed (10 Mbps to Gbps)</a:t>
+            </a:r>
+            <a:br>
+              <a:rPr lang="en-IN" dirty="0"/>
+            </a:br>
+            <a:endParaRPr lang="en-IN" dirty="0"/>
+          </a:p>
+          <a:p>
+            <a:r>
+              <a:rPr lang="en-IN" b="1" dirty="0"/>
+              <a:t>Key Features</a:t>
+            </a:r>
+          </a:p>
+          <a:p>
+            <a:r>
+              <a:rPr lang="en-IN" b="1" dirty="0"/>
+              <a:t>High bandwidth</a:t>
+            </a:r>
+            <a:r>
+              <a:rPr lang="en-IN" dirty="0"/>
+              <a:t> → handles huge data easily</a:t>
+            </a:r>
+          </a:p>
+          <a:p>
+            <a:r>
+              <a:rPr lang="en-IN" b="1" dirty="0"/>
+              <a:t>Low delay (latency)</a:t>
+            </a:r>
+            <a:r>
+              <a:rPr lang="en-IN" dirty="0"/>
+              <a:t> → fast real-time response</a:t>
+            </a:r>
+          </a:p>
+          <a:p>
+            <a:r>
+              <a:rPr lang="en-IN" b="1" dirty="0"/>
+              <a:t>Scalable</a:t>
+            </a:r>
+            <a:r>
+              <a:rPr lang="en-IN" dirty="0"/>
+              <a:t> → supports future technologies</a:t>
+            </a:r>
+          </a:p>
+          <a:p>
+            <a:r>
+              <a:rPr lang="en-IN" b="1" dirty="0"/>
+              <a:t>Reliable communication</a:t>
+            </a:r>
+            <a:r>
+              <a:rPr lang="en-IN" dirty="0"/>
+              <a:t> for critical systems</a:t>
+            </a:r>
+          </a:p>
+          <a:p>
+            <a:endParaRPr lang="en-IN" dirty="0"/>
+          </a:p>
+        </p:txBody>
+      </p:sp>
     </p:spTree>
   </p:cSld>
   <p:clrMapOvr>
@@ -15726,7 +15901,7 @@
           <a:lstStyle/>
           <a:p>
             <a:r>
-              <a:rPr lang="en-IN" sz="3400"/>
+              <a:rPr lang="en-IN" sz="3400" dirty="0"/>
               <a:t>UDS (Diagnostics)</a:t>
             </a:r>
           </a:p>
@@ -15881,8 +16056,8 @@
         </p:nvSpPr>
         <p:spPr>
           <a:xfrm>
-            <a:off x="411480" y="2684095"/>
-            <a:ext cx="4443154" cy="3492868"/>
+            <a:off x="411479" y="2426753"/>
+            <a:ext cx="7448007" cy="4104675"/>
           </a:xfrm>
         </p:spPr>
         <p:txBody>
@@ -15892,26 +16067,69 @@
           <a:lstStyle/>
           <a:p>
             <a:r>
-              <a:rPr lang="en-GB" sz="1800"/>
-              <a:t>Unified Diagnostic Services</a:t>
-            </a:r>
-          </a:p>
-          <a:p>
-            <a:r>
-              <a:rPr lang="en-GB" sz="1800"/>
-              <a:t>Used to detect vehicle issues</a:t>
-            </a:r>
-          </a:p>
-          <a:p>
-            <a:r>
-              <a:rPr lang="en-GB" sz="1800"/>
-              <a:t>Supports firmware update</a:t>
-            </a:r>
-          </a:p>
-          <a:p>
-            <a:r>
-              <a:rPr lang="en-GB" sz="1800"/>
-              <a:t>Used by service engineers</a:t>
+              <a:rPr lang="en-IN" sz="1800" dirty="0"/>
+              <a:t>A standard protocol used for vehicle diagnostics and communication</a:t>
+            </a:r>
+          </a:p>
+          <a:p>
+            <a:r>
+              <a:rPr lang="en-IN" sz="1800" dirty="0"/>
+              <a:t>Helps to detect faults and issues in ECUs</a:t>
+            </a:r>
+          </a:p>
+          <a:p>
+            <a:r>
+              <a:rPr lang="en-IN" sz="1800" dirty="0"/>
+              <a:t>Allows reading and clearing error codes (DTCs)</a:t>
+            </a:r>
+            <a:br>
+              <a:rPr lang="en-IN" sz="1800" dirty="0"/>
+            </a:br>
+            <a:endParaRPr lang="en-IN" sz="1800" dirty="0"/>
+          </a:p>
+          <a:p>
+            <a:r>
+              <a:rPr lang="en-IN" sz="1800" b="1" dirty="0"/>
+              <a:t>Key Functions</a:t>
+            </a:r>
+          </a:p>
+          <a:p>
+            <a:r>
+              <a:rPr lang="en-IN" sz="1800" b="1" dirty="0"/>
+              <a:t>Monitoring &amp; Diagnosis</a:t>
+            </a:r>
+            <a:br>
+              <a:rPr lang="en-IN" sz="1800" dirty="0"/>
+            </a:br>
+            <a:r>
+              <a:rPr lang="en-IN" sz="1800" dirty="0"/>
+              <a:t>Check ECU status, sensor data, and system health</a:t>
+            </a:r>
+          </a:p>
+          <a:p>
+            <a:r>
+              <a:rPr lang="en-IN" sz="1800" b="1" dirty="0"/>
+              <a:t>Firmware Update (Reprogramming)</a:t>
+            </a:r>
+            <a:br>
+              <a:rPr lang="en-IN" sz="1800" dirty="0"/>
+            </a:br>
+            <a:r>
+              <a:rPr lang="en-IN" sz="1800" dirty="0"/>
+              <a:t>Supports software/firmware updates in ECUs</a:t>
+            </a:r>
+          </a:p>
+          <a:p>
+            <a:r>
+              <a:rPr lang="en-IN" sz="1800" b="1" dirty="0"/>
+              <a:t>Configuration &amp; Testing</a:t>
+            </a:r>
+            <a:br>
+              <a:rPr lang="en-IN" sz="1800" dirty="0"/>
+            </a:br>
+            <a:r>
+              <a:rPr lang="en-IN" sz="1800" dirty="0"/>
+              <a:t>Used to test and configure ECU functions</a:t>
             </a:r>
           </a:p>
         </p:txBody>
@@ -15944,7 +16162,7 @@
         </p:blipFill>
         <p:spPr>
           <a:xfrm>
-            <a:off x="5385816" y="986164"/>
+            <a:off x="5603530" y="1938123"/>
             <a:ext cx="6440424" cy="4830318"/>
           </a:xfrm>
           <a:prstGeom prst="rect">
@@ -16000,7 +16218,7 @@
           <a:p>
             <a:fld id="{1D9AC971-A1D0-4198-BAFF-7A2D0F6248EC}" type="datetime1">
               <a:rPr lang="en-US" smtClean="0"/>
-              <a:t>5/25/2026</a:t>
+              <a:t>5/28/2026</a:t>
             </a:fld>
             <a:endParaRPr lang="en-US"/>
           </a:p>
@@ -16086,14 +16304,220 @@
         </p:blipFill>
         <p:spPr>
           <a:xfrm>
-            <a:off x="1985703" y="876489"/>
-            <a:ext cx="8220592" cy="5105025"/>
+            <a:off x="6014343" y="2667900"/>
+            <a:ext cx="5993526" cy="3722007"/>
           </a:xfrm>
           <a:prstGeom prst="rect">
             <a:avLst/>
           </a:prstGeom>
         </p:spPr>
       </p:pic>
+      <p:sp>
+        <p:nvSpPr>
+          <p:cNvPr id="3" name="TextBox 2">
+            <a:extLst>
+              <a:ext uri="{FF2B5EF4-FFF2-40B4-BE49-F238E27FC236}">
+                <a16:creationId xmlns:a16="http://schemas.microsoft.com/office/drawing/2014/main" id="{16D033A1-0FFF-D9DE-29F0-08A9D60819F5}"/>
+              </a:ext>
+            </a:extLst>
+          </p:cNvPr>
+          <p:cNvSpPr txBox="1"/>
+          <p:nvPr/>
+        </p:nvSpPr>
+        <p:spPr>
+          <a:xfrm>
+            <a:off x="500741" y="784677"/>
+            <a:ext cx="10417629" cy="4622869"/>
+          </a:xfrm>
+          <a:prstGeom prst="rect">
+            <a:avLst/>
+          </a:prstGeom>
+          <a:noFill/>
+        </p:spPr>
+        <p:txBody>
+          <a:bodyPr wrap="square">
+            <a:spAutoFit/>
+          </a:bodyPr>
+          <a:lstStyle/>
+          <a:p>
+            <a:pPr>
+              <a:lnSpc>
+                <a:spcPct val="150000"/>
+              </a:lnSpc>
+              <a:buNone/>
+            </a:pPr>
+            <a:r>
+              <a:rPr lang="en-GB" b="1" dirty="0"/>
+              <a:t>UDS in OSI Model</a:t>
+            </a:r>
+          </a:p>
+          <a:p>
+            <a:pPr>
+              <a:lnSpc>
+                <a:spcPct val="150000"/>
+              </a:lnSpc>
+              <a:buFont typeface="Arial" panose="020B0604020202020204" pitchFamily="34" charset="0"/>
+              <a:buChar char="•"/>
+            </a:pPr>
+            <a:r>
+              <a:rPr lang="en-GB" dirty="0"/>
+              <a:t>UDS works at the </a:t>
+            </a:r>
+            <a:r>
+              <a:rPr lang="en-GB" b="1" dirty="0"/>
+              <a:t>Application Layer</a:t>
+            </a:r>
+            <a:r>
+              <a:rPr lang="en-GB" dirty="0"/>
+              <a:t> of the OSI model</a:t>
+            </a:r>
+          </a:p>
+          <a:p>
+            <a:pPr>
+              <a:lnSpc>
+                <a:spcPct val="150000"/>
+              </a:lnSpc>
+              <a:buFont typeface="Arial" panose="020B0604020202020204" pitchFamily="34" charset="0"/>
+              <a:buChar char="•"/>
+            </a:pPr>
+            <a:r>
+              <a:rPr lang="en-GB" dirty="0"/>
+              <a:t>It is used for </a:t>
+            </a:r>
+            <a:r>
+              <a:rPr lang="en-GB" b="1" dirty="0"/>
+              <a:t>diagnostics and control of ECUs</a:t>
+            </a:r>
+            <a:endParaRPr lang="en-GB" dirty="0"/>
+          </a:p>
+          <a:p>
+            <a:pPr>
+              <a:lnSpc>
+                <a:spcPct val="150000"/>
+              </a:lnSpc>
+              <a:buFont typeface="Arial" panose="020B0604020202020204" pitchFamily="34" charset="0"/>
+              <a:buChar char="•"/>
+            </a:pPr>
+            <a:r>
+              <a:rPr lang="en-GB" dirty="0"/>
+              <a:t>Below UDS, </a:t>
+            </a:r>
+            <a:r>
+              <a:rPr lang="en-GB" b="1" dirty="0"/>
+              <a:t>communication protocols</a:t>
+            </a:r>
+            <a:r>
+              <a:rPr lang="en-GB" dirty="0"/>
+              <a:t> like CAN handle data transfer</a:t>
+            </a:r>
+          </a:p>
+          <a:p>
+            <a:pPr>
+              <a:lnSpc>
+                <a:spcPct val="150000"/>
+              </a:lnSpc>
+              <a:buFont typeface="Arial" panose="020B0604020202020204" pitchFamily="34" charset="0"/>
+              <a:buChar char="•"/>
+            </a:pPr>
+            <a:r>
+              <a:rPr lang="en-GB" dirty="0"/>
+              <a:t>CAN works in </a:t>
+            </a:r>
+            <a:r>
+              <a:rPr lang="en-GB" b="1" dirty="0"/>
+              <a:t>lower layers</a:t>
+            </a:r>
+            <a:r>
+              <a:rPr lang="en-GB" dirty="0"/>
+              <a:t> (network, data, physical)</a:t>
+            </a:r>
+          </a:p>
+          <a:p>
+            <a:pPr>
+              <a:lnSpc>
+                <a:spcPct val="150000"/>
+              </a:lnSpc>
+              <a:buNone/>
+            </a:pPr>
+            <a:br>
+              <a:rPr lang="en-GB" dirty="0"/>
+            </a:br>
+            <a:endParaRPr lang="en-GB" dirty="0"/>
+          </a:p>
+          <a:p>
+            <a:pPr>
+              <a:lnSpc>
+                <a:spcPct val="150000"/>
+              </a:lnSpc>
+              <a:buNone/>
+            </a:pPr>
+            <a:r>
+              <a:rPr lang="en-GB" b="1" dirty="0"/>
+              <a:t>How It Works</a:t>
+            </a:r>
+          </a:p>
+          <a:p>
+            <a:pPr>
+              <a:lnSpc>
+                <a:spcPct val="150000"/>
+              </a:lnSpc>
+              <a:buFont typeface="Arial" panose="020B0604020202020204" pitchFamily="34" charset="0"/>
+              <a:buChar char="•"/>
+            </a:pPr>
+            <a:r>
+              <a:rPr lang="en-GB" dirty="0"/>
+              <a:t>UDS sends </a:t>
+            </a:r>
+            <a:r>
+              <a:rPr lang="en-GB" b="1" dirty="0"/>
+              <a:t>diagnostic requests</a:t>
+            </a:r>
+            <a:r>
+              <a:rPr lang="en-GB" dirty="0"/>
+              <a:t> to ECUs</a:t>
+            </a:r>
+          </a:p>
+          <a:p>
+            <a:pPr>
+              <a:lnSpc>
+                <a:spcPct val="150000"/>
+              </a:lnSpc>
+              <a:buFont typeface="Arial" panose="020B0604020202020204" pitchFamily="34" charset="0"/>
+              <a:buChar char="•"/>
+            </a:pPr>
+            <a:r>
+              <a:rPr lang="en-GB" dirty="0"/>
+              <a:t>CAN/Ethernet </a:t>
+            </a:r>
+            <a:r>
+              <a:rPr lang="en-GB" b="1" dirty="0"/>
+              <a:t>carries these messages</a:t>
+            </a:r>
+            <a:r>
+              <a:rPr lang="en-GB" dirty="0"/>
+              <a:t> between ECUs</a:t>
+            </a:r>
+          </a:p>
+          <a:p>
+            <a:pPr>
+              <a:lnSpc>
+                <a:spcPct val="150000"/>
+              </a:lnSpc>
+              <a:buFont typeface="Arial" panose="020B0604020202020204" pitchFamily="34" charset="0"/>
+              <a:buChar char="•"/>
+            </a:pPr>
+            <a:r>
+              <a:rPr lang="en-GB" dirty="0"/>
+              <a:t>ECU processes the request and </a:t>
+            </a:r>
+            <a:r>
+              <a:rPr lang="en-GB" b="1" dirty="0"/>
+              <a:t>sends back a response</a:t>
+            </a:r>
+            <a:endParaRPr lang="en-GB" dirty="0"/>
+          </a:p>
+        </p:txBody>
+      </p:sp>
     </p:spTree>
     <p:extLst>
       <p:ext uri="{BB962C8B-B14F-4D97-AF65-F5344CB8AC3E}">
@@ -16149,8 +16573,8 @@
         </p:blipFill>
         <p:spPr>
           <a:xfrm>
-            <a:off x="892629" y="914399"/>
-            <a:ext cx="10844477" cy="4528458"/>
+            <a:off x="957943" y="393831"/>
+            <a:ext cx="10472057" cy="3916912"/>
           </a:xfrm>
           <a:prstGeom prst="rect">
             <a:avLst/>
@@ -16180,7 +16604,7 @@
           <a:p>
             <a:fld id="{23D559D9-1CD2-4816-B6F3-35BB221A9954}" type="datetime1">
               <a:rPr lang="en-US" smtClean="0"/>
-              <a:t>5/25/2026</a:t>
+              <a:t>5/28/2026</a:t>
             </a:fld>
             <a:endParaRPr lang="en-US"/>
           </a:p>
@@ -16241,6 +16665,139 @@
               <a:t>15</a:t>
             </a:fld>
             <a:endParaRPr lang="en-US"/>
+          </a:p>
+        </p:txBody>
+      </p:sp>
+      <p:sp>
+        <p:nvSpPr>
+          <p:cNvPr id="8" name="TextBox 7">
+            <a:extLst>
+              <a:ext uri="{FF2B5EF4-FFF2-40B4-BE49-F238E27FC236}">
+                <a16:creationId xmlns:a16="http://schemas.microsoft.com/office/drawing/2014/main" id="{F5DF771E-1BD2-9E5E-62A7-CF705F6A455D}"/>
+              </a:ext>
+            </a:extLst>
+          </p:cNvPr>
+          <p:cNvSpPr txBox="1"/>
+          <p:nvPr/>
+        </p:nvSpPr>
+        <p:spPr>
+          <a:xfrm>
+            <a:off x="1121228" y="4310743"/>
+            <a:ext cx="10112829" cy="1754326"/>
+          </a:xfrm>
+          <a:prstGeom prst="rect">
+            <a:avLst/>
+          </a:prstGeom>
+          <a:noFill/>
+        </p:spPr>
+        <p:txBody>
+          <a:bodyPr wrap="square">
+            <a:spAutoFit/>
+          </a:bodyPr>
+          <a:lstStyle/>
+          <a:p>
+            <a:pPr>
+              <a:buFont typeface="Arial" panose="020B0604020202020204" pitchFamily="34" charset="0"/>
+              <a:buChar char="•"/>
+            </a:pPr>
+            <a:r>
+              <a:rPr lang="en-GB" dirty="0"/>
+              <a:t>A </a:t>
+            </a:r>
+            <a:r>
+              <a:rPr lang="en-GB" b="1" dirty="0"/>
+              <a:t>service engineer (client)</a:t>
+            </a:r>
+            <a:r>
+              <a:rPr lang="en-GB" dirty="0"/>
+              <a:t> uses a </a:t>
+            </a:r>
+            <a:r>
+              <a:rPr lang="en-GB" b="1" dirty="0"/>
+              <a:t>laptop with diagnostic software</a:t>
+            </a:r>
+            <a:endParaRPr lang="en-GB" dirty="0"/>
+          </a:p>
+          <a:p>
+            <a:pPr>
+              <a:buFont typeface="Arial" panose="020B0604020202020204" pitchFamily="34" charset="0"/>
+              <a:buChar char="•"/>
+            </a:pPr>
+            <a:r>
+              <a:rPr lang="en-GB" dirty="0"/>
+              <a:t>The laptop is connected using an </a:t>
+            </a:r>
+            <a:r>
+              <a:rPr lang="en-GB" b="1" dirty="0"/>
+              <a:t>OBD cable (interface)</a:t>
+            </a:r>
+            <a:endParaRPr lang="en-GB" dirty="0"/>
+          </a:p>
+          <a:p>
+            <a:pPr>
+              <a:buFont typeface="Arial" panose="020B0604020202020204" pitchFamily="34" charset="0"/>
+              <a:buChar char="•"/>
+            </a:pPr>
+            <a:r>
+              <a:rPr lang="en-GB" dirty="0"/>
+              <a:t>The cable is plugged into the vehicle’s </a:t>
+            </a:r>
+            <a:r>
+              <a:rPr lang="en-GB" b="1" dirty="0"/>
+              <a:t>OBD port</a:t>
+            </a:r>
+            <a:endParaRPr lang="en-GB" dirty="0"/>
+          </a:p>
+          <a:p>
+            <a:pPr>
+              <a:buFont typeface="Arial" panose="020B0604020202020204" pitchFamily="34" charset="0"/>
+              <a:buChar char="•"/>
+            </a:pPr>
+            <a:r>
+              <a:rPr lang="en-GB" dirty="0"/>
+              <a:t>The laptop sends </a:t>
+            </a:r>
+            <a:r>
+              <a:rPr lang="en-GB" b="1" dirty="0"/>
+              <a:t>UDS requests</a:t>
+            </a:r>
+            <a:r>
+              <a:rPr lang="en-GB" dirty="0"/>
+              <a:t> to the vehicle</a:t>
+            </a:r>
+          </a:p>
+          <a:p>
+            <a:pPr>
+              <a:buFont typeface="Arial" panose="020B0604020202020204" pitchFamily="34" charset="0"/>
+              <a:buChar char="•"/>
+            </a:pPr>
+            <a:r>
+              <a:rPr lang="en-GB" dirty="0"/>
+              <a:t>The </a:t>
+            </a:r>
+            <a:r>
+              <a:rPr lang="en-GB" b="1" dirty="0"/>
+              <a:t>vehicle (server / ECUs)</a:t>
+            </a:r>
+            <a:r>
+              <a:rPr lang="en-GB" dirty="0"/>
+              <a:t> receives the request</a:t>
+            </a:r>
+          </a:p>
+          <a:p>
+            <a:pPr>
+              <a:buFont typeface="Arial" panose="020B0604020202020204" pitchFamily="34" charset="0"/>
+              <a:buChar char="•"/>
+            </a:pPr>
+            <a:r>
+              <a:rPr lang="en-GB" dirty="0"/>
+              <a:t>ECUs </a:t>
+            </a:r>
+            <a:r>
+              <a:rPr lang="en-GB" b="1" dirty="0"/>
+              <a:t>process the request and send a response back</a:t>
+            </a:r>
+            <a:endParaRPr lang="en-GB" dirty="0"/>
           </a:p>
         </p:txBody>
       </p:sp>
@@ -16363,7 +16920,7 @@
           <a:p>
             <a:fld id="{0A88044A-2C1F-4B97-9512-6D923735F050}" type="datetime1">
               <a:rPr lang="en-US" smtClean="0"/>
-              <a:t>5/25/2026</a:t>
+              <a:t>5/28/2026</a:t>
             </a:fld>
             <a:endParaRPr lang="en-US"/>
           </a:p>
@@ -18366,9 +18923,14 @@
           <a:lstStyle/>
           <a:p>
             <a:r>
+              <a:rPr lang="en-IN" sz="4000" dirty="0"/>
+              <a:t>Stellantis’ </a:t>
+            </a:r>
+            <a:r>
               <a:rPr lang="en-IN" sz="4000"/>
-              <a:t>Stellantis Architecture</a:t>
-            </a:r>
+              <a:t>STLA Platform</a:t>
+            </a:r>
+            <a:endParaRPr lang="en-IN" sz="4000" dirty="0"/>
           </a:p>
         </p:txBody>
       </p:sp>
@@ -18452,8 +19014,8 @@
         </p:nvSpPr>
         <p:spPr>
           <a:xfrm>
-            <a:off x="1115568" y="2481943"/>
-            <a:ext cx="10168128" cy="3695020"/>
+            <a:off x="558209" y="2221992"/>
+            <a:ext cx="8934133" cy="4352980"/>
           </a:xfrm>
         </p:spPr>
         <p:txBody>
@@ -18462,34 +19024,230 @@
           </a:bodyPr>
           <a:lstStyle/>
           <a:p>
-            <a:r>
-              <a:rPr lang="en-GB" sz="2200"/>
-              <a:t>Uses Domain Controllers (group of ECUs for each function)</a:t>
-            </a:r>
-          </a:p>
-          <a:p>
-            <a:r>
-              <a:rPr lang="en-GB" sz="2200"/>
-              <a:t>Uses Gateway ECU to connect all networks</a:t>
-            </a:r>
-          </a:p>
-          <a:p>
-            <a:r>
-              <a:rPr lang="en-GB" sz="2200"/>
-              <a:t>Communication via CAN / CAN FD</a:t>
-            </a:r>
-          </a:p>
-          <a:p>
-            <a:r>
-              <a:rPr lang="en-GB" sz="2200"/>
-              <a:t>Uses Ethernet Backbone for high-speed data</a:t>
-            </a:r>
-          </a:p>
-          <a:p>
-            <a:r>
-              <a:rPr lang="en-GB" sz="2200"/>
-              <a:t>Moving towards Centralized Computing</a:t>
-            </a:r>
+            <a:pPr fontAlgn="t">
+              <a:lnSpc>
+                <a:spcPts val="1500"/>
+              </a:lnSpc>
+              <a:buNone/>
+            </a:pPr>
+            <a:r>
+              <a:rPr lang="en-IN" sz="1800" b="1" dirty="0">
+                <a:latin typeface="Segoe UI" panose="020B0502040204020203" pitchFamily="34" charset="0"/>
+              </a:rPr>
+              <a:t>What is STLA?</a:t>
+            </a:r>
+            <a:endParaRPr lang="en-IN" sz="1800" dirty="0">
+              <a:latin typeface="Segoe UI" panose="020B0502040204020203" pitchFamily="34" charset="0"/>
+            </a:endParaRPr>
+          </a:p>
+          <a:p>
+            <a:pPr fontAlgn="t">
+              <a:lnSpc>
+                <a:spcPts val="1500"/>
+              </a:lnSpc>
+            </a:pPr>
+            <a:r>
+              <a:rPr lang="en-IN" sz="1800" dirty="0">
+                <a:latin typeface="Segoe UI" panose="020B0502040204020203" pitchFamily="34" charset="0"/>
+              </a:rPr>
+              <a:t>STLA (Stella) = Dedicated </a:t>
+            </a:r>
+            <a:r>
+              <a:rPr lang="en-IN" sz="1800" b="1" dirty="0">
+                <a:latin typeface="Segoe UI" panose="020B0502040204020203" pitchFamily="34" charset="0"/>
+              </a:rPr>
+              <a:t>electric vehicle (EV) platforms</a:t>
+            </a:r>
+            <a:endParaRPr lang="en-IN" sz="1800" dirty="0">
+              <a:latin typeface="Segoe UI" panose="020B0502040204020203" pitchFamily="34" charset="0"/>
+            </a:endParaRPr>
+          </a:p>
+          <a:p>
+            <a:pPr fontAlgn="t">
+              <a:lnSpc>
+                <a:spcPts val="1500"/>
+              </a:lnSpc>
+            </a:pPr>
+            <a:r>
+              <a:rPr lang="en-IN" sz="1800" dirty="0">
+                <a:latin typeface="Segoe UI" panose="020B0502040204020203" pitchFamily="34" charset="0"/>
+              </a:rPr>
+              <a:t>Common base used across multiple Stellantis brands</a:t>
+            </a:r>
+          </a:p>
+          <a:p>
+            <a:pPr fontAlgn="t">
+              <a:lnSpc>
+                <a:spcPts val="1500"/>
+              </a:lnSpc>
+              <a:buNone/>
+            </a:pPr>
+            <a:r>
+              <a:rPr lang="en-IN" sz="1800" b="1" dirty="0">
+                <a:latin typeface="Segoe UI" panose="020B0502040204020203" pitchFamily="34" charset="0"/>
+              </a:rPr>
+              <a:t>Platform Types:</a:t>
+            </a:r>
+            <a:endParaRPr lang="en-IN" sz="1800" dirty="0">
+              <a:latin typeface="Segoe UI" panose="020B0502040204020203" pitchFamily="34" charset="0"/>
+            </a:endParaRPr>
+          </a:p>
+          <a:p>
+            <a:pPr fontAlgn="t">
+              <a:lnSpc>
+                <a:spcPts val="1500"/>
+              </a:lnSpc>
+            </a:pPr>
+            <a:r>
+              <a:rPr lang="en-IN" sz="1800" b="1" dirty="0">
+                <a:latin typeface="Segoe UI" panose="020B0502040204020203" pitchFamily="34" charset="0"/>
+              </a:rPr>
+              <a:t>STLA Small</a:t>
+            </a:r>
+            <a:r>
+              <a:rPr lang="en-IN" sz="1800" dirty="0">
+                <a:latin typeface="Segoe UI" panose="020B0502040204020203" pitchFamily="34" charset="0"/>
+              </a:rPr>
+              <a:t> → Small cars</a:t>
+            </a:r>
+          </a:p>
+          <a:p>
+            <a:pPr fontAlgn="t">
+              <a:lnSpc>
+                <a:spcPts val="1500"/>
+              </a:lnSpc>
+            </a:pPr>
+            <a:r>
+              <a:rPr lang="en-IN" sz="1800" b="1" dirty="0">
+                <a:latin typeface="Segoe UI" panose="020B0502040204020203" pitchFamily="34" charset="0"/>
+              </a:rPr>
+              <a:t>STLA Medium</a:t>
+            </a:r>
+            <a:r>
+              <a:rPr lang="en-IN" sz="1800" dirty="0">
+                <a:latin typeface="Segoe UI" panose="020B0502040204020203" pitchFamily="34" charset="0"/>
+              </a:rPr>
+              <a:t> → Mid-size cars</a:t>
+            </a:r>
+          </a:p>
+          <a:p>
+            <a:pPr fontAlgn="t">
+              <a:lnSpc>
+                <a:spcPts val="1500"/>
+              </a:lnSpc>
+            </a:pPr>
+            <a:r>
+              <a:rPr lang="en-IN" sz="1800" b="1" dirty="0">
+                <a:latin typeface="Segoe UI" panose="020B0502040204020203" pitchFamily="34" charset="0"/>
+              </a:rPr>
+              <a:t>STLA Large</a:t>
+            </a:r>
+            <a:r>
+              <a:rPr lang="en-IN" sz="1800" dirty="0">
+                <a:latin typeface="Segoe UI" panose="020B0502040204020203" pitchFamily="34" charset="0"/>
+              </a:rPr>
+              <a:t> → Premium &amp; performance cars</a:t>
+            </a:r>
+          </a:p>
+          <a:p>
+            <a:pPr fontAlgn="t">
+              <a:lnSpc>
+                <a:spcPts val="1500"/>
+              </a:lnSpc>
+            </a:pPr>
+            <a:r>
+              <a:rPr lang="en-IN" sz="1800" b="1" dirty="0">
+                <a:latin typeface="Segoe UI" panose="020B0502040204020203" pitchFamily="34" charset="0"/>
+              </a:rPr>
+              <a:t>STLA Frame</a:t>
+            </a:r>
+            <a:r>
+              <a:rPr lang="en-IN" sz="1800" dirty="0">
+                <a:latin typeface="Segoe UI" panose="020B0502040204020203" pitchFamily="34" charset="0"/>
+              </a:rPr>
+              <a:t> → SUVs, pickup trucks</a:t>
+            </a:r>
+          </a:p>
+          <a:p>
+            <a:pPr fontAlgn="t">
+              <a:lnSpc>
+                <a:spcPts val="1500"/>
+              </a:lnSpc>
+              <a:buNone/>
+            </a:pPr>
+            <a:r>
+              <a:rPr lang="en-IN" sz="1800" b="1" dirty="0">
+                <a:latin typeface="Segoe UI" panose="020B0502040204020203" pitchFamily="34" charset="0"/>
+              </a:rPr>
+              <a:t>Key Features:</a:t>
+            </a:r>
+            <a:endParaRPr lang="en-IN" sz="1800" dirty="0">
+              <a:latin typeface="Segoe UI" panose="020B0502040204020203" pitchFamily="34" charset="0"/>
+            </a:endParaRPr>
+          </a:p>
+          <a:p>
+            <a:pPr fontAlgn="t">
+              <a:lnSpc>
+                <a:spcPts val="1500"/>
+              </a:lnSpc>
+            </a:pPr>
+            <a:r>
+              <a:rPr lang="en-IN" sz="1800" dirty="0">
+                <a:latin typeface="Segoe UI" panose="020B0502040204020203" pitchFamily="34" charset="0"/>
+              </a:rPr>
+              <a:t>Driving range: </a:t>
+            </a:r>
+            <a:r>
+              <a:rPr lang="en-IN" sz="1800" b="1" dirty="0">
+                <a:latin typeface="Segoe UI" panose="020B0502040204020203" pitchFamily="34" charset="0"/>
+              </a:rPr>
+              <a:t>500–800+ km</a:t>
+            </a:r>
+            <a:endParaRPr lang="en-IN" sz="1800" dirty="0">
+              <a:latin typeface="Segoe UI" panose="020B0502040204020203" pitchFamily="34" charset="0"/>
+            </a:endParaRPr>
+          </a:p>
+          <a:p>
+            <a:pPr fontAlgn="t">
+              <a:lnSpc>
+                <a:spcPts val="1500"/>
+              </a:lnSpc>
+            </a:pPr>
+            <a:r>
+              <a:rPr lang="en-IN" sz="1800" dirty="0">
+                <a:latin typeface="Segoe UI" panose="020B0502040204020203" pitchFamily="34" charset="0"/>
+              </a:rPr>
+              <a:t>Fast charging (~320 km in 10 min)</a:t>
+            </a:r>
+          </a:p>
+          <a:p>
+            <a:pPr fontAlgn="t">
+              <a:lnSpc>
+                <a:spcPts val="1500"/>
+              </a:lnSpc>
+            </a:pPr>
+            <a:r>
+              <a:rPr lang="en-IN" sz="1800" dirty="0">
+                <a:latin typeface="Segoe UI" panose="020B0502040204020203" pitchFamily="34" charset="0"/>
+              </a:rPr>
+              <a:t>High performance (0–100 km/h ~2 sec)</a:t>
+            </a:r>
+          </a:p>
+          <a:p>
+            <a:pPr fontAlgn="t">
+              <a:lnSpc>
+                <a:spcPts val="1500"/>
+              </a:lnSpc>
+            </a:pPr>
+            <a:r>
+              <a:rPr lang="en-IN" sz="1800" dirty="0">
+                <a:latin typeface="Segoe UI" panose="020B0502040204020203" pitchFamily="34" charset="0"/>
+              </a:rPr>
+              <a:t>Supports FWD, RWD, AWD configurations</a:t>
+            </a:r>
+          </a:p>
+          <a:p>
+            <a:endParaRPr lang="en-GB" sz="2200" dirty="0"/>
           </a:p>
         </p:txBody>
       </p:sp>
@@ -18520,7 +19278,13 @@
       </p:grpSpPr>
       <p:sp>
         <p:nvSpPr>
-          <p:cNvPr id="2" name="Title 1"/>
+          <p:cNvPr id="2" name="Title 1">
+            <a:extLst>
+              <a:ext uri="{FF2B5EF4-FFF2-40B4-BE49-F238E27FC236}">
+                <a16:creationId xmlns:a16="http://schemas.microsoft.com/office/drawing/2014/main" id="{C945870B-5D5D-99CF-7CCE-B14B54F2179A}"/>
+              </a:ext>
+            </a:extLst>
+          </p:cNvPr>
           <p:cNvSpPr>
             <a:spLocks noGrp="1"/>
           </p:cNvSpPr>
@@ -18534,8 +19298,559 @@
           <a:lstStyle/>
           <a:p>
             <a:r>
+              <a:rPr lang="en-IN" dirty="0"/>
+              <a:t> Technology and Future Vision</a:t>
+            </a:r>
+          </a:p>
+        </p:txBody>
+      </p:sp>
+      <p:sp>
+        <p:nvSpPr>
+          <p:cNvPr id="6" name="Content Placeholder 5">
+            <a:extLst>
+              <a:ext uri="{FF2B5EF4-FFF2-40B4-BE49-F238E27FC236}">
+                <a16:creationId xmlns:a16="http://schemas.microsoft.com/office/drawing/2014/main" id="{2ECCC534-8B6E-FD10-77A2-749AF776BD4D}"/>
+              </a:ext>
+            </a:extLst>
+          </p:cNvPr>
+          <p:cNvSpPr>
+            <a:spLocks noGrp="1"/>
+          </p:cNvSpPr>
+          <p:nvPr>
+            <p:ph idx="1"/>
+          </p:nvPr>
+        </p:nvSpPr>
+        <p:spPr/>
+        <p:txBody>
+          <a:bodyPr/>
+          <a:lstStyle/>
+          <a:p>
+            <a:pPr fontAlgn="t">
+              <a:lnSpc>
+                <a:spcPts val="1500"/>
+              </a:lnSpc>
+              <a:buNone/>
+            </a:pPr>
+            <a:r>
+              <a:rPr lang="en-IN" sz="2000" b="1" dirty="0">
+                <a:latin typeface="Segoe UI" panose="020B0502040204020203" pitchFamily="34" charset="0"/>
+              </a:rPr>
+              <a:t>Battery &amp; Powertrain:</a:t>
+            </a:r>
+            <a:endParaRPr lang="en-IN" sz="2000" dirty="0">
+              <a:latin typeface="Segoe UI" panose="020B0502040204020203" pitchFamily="34" charset="0"/>
+            </a:endParaRPr>
+          </a:p>
+          <a:p>
+            <a:pPr fontAlgn="t">
+              <a:lnSpc>
+                <a:spcPts val="1500"/>
+              </a:lnSpc>
+            </a:pPr>
+            <a:r>
+              <a:rPr lang="en-IN" sz="2000" dirty="0">
+                <a:latin typeface="Segoe UI" panose="020B0502040204020203" pitchFamily="34" charset="0"/>
+              </a:rPr>
+              <a:t>Battery size: </a:t>
+            </a:r>
+            <a:r>
+              <a:rPr lang="en-IN" sz="2000" b="1" dirty="0">
+                <a:latin typeface="Segoe UI" panose="020B0502040204020203" pitchFamily="34" charset="0"/>
+              </a:rPr>
+              <a:t>37–200 kWh</a:t>
+            </a:r>
+            <a:endParaRPr lang="en-IN" sz="2000" dirty="0">
+              <a:latin typeface="Segoe UI" panose="020B0502040204020203" pitchFamily="34" charset="0"/>
+            </a:endParaRPr>
+          </a:p>
+          <a:p>
+            <a:pPr fontAlgn="t">
+              <a:lnSpc>
+                <a:spcPts val="1500"/>
+              </a:lnSpc>
+            </a:pPr>
+            <a:r>
+              <a:rPr lang="en-IN" sz="2000" dirty="0">
+                <a:latin typeface="Segoe UI" panose="020B0502040204020203" pitchFamily="34" charset="0"/>
+              </a:rPr>
+              <a:t>Dual battery chemistry (low-cost &amp; high-performance options)</a:t>
+            </a:r>
+          </a:p>
+          <a:p>
+            <a:pPr fontAlgn="t">
+              <a:lnSpc>
+                <a:spcPts val="1500"/>
+              </a:lnSpc>
+            </a:pPr>
+            <a:r>
+              <a:rPr lang="en-IN" sz="2000" dirty="0">
+                <a:latin typeface="Segoe UI" panose="020B0502040204020203" pitchFamily="34" charset="0"/>
+              </a:rPr>
+              <a:t>Power output: </a:t>
+            </a:r>
+            <a:r>
+              <a:rPr lang="en-IN" sz="2000" b="1" dirty="0">
+                <a:latin typeface="Segoe UI" panose="020B0502040204020203" pitchFamily="34" charset="0"/>
+              </a:rPr>
+              <a:t>95 hp – 449 hp</a:t>
+            </a:r>
+            <a:endParaRPr lang="en-IN" sz="2000" dirty="0">
+              <a:latin typeface="Segoe UI" panose="020B0502040204020203" pitchFamily="34" charset="0"/>
+            </a:endParaRPr>
+          </a:p>
+          <a:p>
+            <a:pPr fontAlgn="t">
+              <a:lnSpc>
+                <a:spcPts val="1500"/>
+              </a:lnSpc>
+              <a:buNone/>
+            </a:pPr>
+            <a:r>
+              <a:rPr lang="en-IN" sz="2000" b="1" dirty="0">
+                <a:latin typeface="Segoe UI" panose="020B0502040204020203" pitchFamily="34" charset="0"/>
+              </a:rPr>
+              <a:t>Smart Technology (STLA Brain):</a:t>
+            </a:r>
+            <a:endParaRPr lang="en-IN" sz="2000" dirty="0">
+              <a:latin typeface="Segoe UI" panose="020B0502040204020203" pitchFamily="34" charset="0"/>
+            </a:endParaRPr>
+          </a:p>
+          <a:p>
+            <a:pPr fontAlgn="t">
+              <a:lnSpc>
+                <a:spcPts val="1500"/>
+              </a:lnSpc>
+            </a:pPr>
+            <a:r>
+              <a:rPr lang="en-IN" sz="2000" dirty="0">
+                <a:latin typeface="Segoe UI" panose="020B0502040204020203" pitchFamily="34" charset="0"/>
+              </a:rPr>
+              <a:t>Central control system for: </a:t>
+            </a:r>
+          </a:p>
+          <a:p>
+            <a:pPr marL="742950" lvl="1" indent="-285750" fontAlgn="t">
+              <a:lnSpc>
+                <a:spcPts val="1500"/>
+              </a:lnSpc>
+            </a:pPr>
+            <a:r>
+              <a:rPr lang="en-IN" sz="1800" dirty="0">
+                <a:latin typeface="Segoe UI" panose="020B0502040204020203" pitchFamily="34" charset="0"/>
+              </a:rPr>
+              <a:t>Driving</a:t>
+            </a:r>
+          </a:p>
+          <a:p>
+            <a:pPr marL="742950" lvl="1" indent="-285750" fontAlgn="t">
+              <a:lnSpc>
+                <a:spcPts val="1500"/>
+              </a:lnSpc>
+            </a:pPr>
+            <a:r>
+              <a:rPr lang="en-IN" sz="1800" dirty="0">
+                <a:latin typeface="Segoe UI" panose="020B0502040204020203" pitchFamily="34" charset="0"/>
+              </a:rPr>
+              <a:t>Connectivity</a:t>
+            </a:r>
+          </a:p>
+          <a:p>
+            <a:pPr marL="742950" lvl="1" indent="-285750" fontAlgn="t">
+              <a:lnSpc>
+                <a:spcPts val="1500"/>
+              </a:lnSpc>
+            </a:pPr>
+            <a:r>
+              <a:rPr lang="en-IN" sz="1800" dirty="0">
+                <a:latin typeface="Segoe UI" panose="020B0502040204020203" pitchFamily="34" charset="0"/>
+              </a:rPr>
+              <a:t>Autonomous features</a:t>
+            </a:r>
+          </a:p>
+          <a:p>
+            <a:pPr fontAlgn="t">
+              <a:lnSpc>
+                <a:spcPts val="1500"/>
+              </a:lnSpc>
+            </a:pPr>
+            <a:r>
+              <a:rPr lang="en-IN" sz="2000" dirty="0">
+                <a:latin typeface="Segoe UI" panose="020B0502040204020203" pitchFamily="34" charset="0"/>
+              </a:rPr>
+              <a:t>Supports </a:t>
+            </a:r>
+            <a:r>
+              <a:rPr lang="en-IN" sz="2000" b="1" dirty="0">
+                <a:latin typeface="Segoe UI" panose="020B0502040204020203" pitchFamily="34" charset="0"/>
+              </a:rPr>
+              <a:t>OTA updates (like smartphones)</a:t>
+            </a:r>
+            <a:endParaRPr lang="en-IN" sz="2000" dirty="0">
+              <a:latin typeface="Segoe UI" panose="020B0502040204020203" pitchFamily="34" charset="0"/>
+            </a:endParaRPr>
+          </a:p>
+          <a:p>
+            <a:pPr fontAlgn="t">
+              <a:lnSpc>
+                <a:spcPts val="1500"/>
+              </a:lnSpc>
+              <a:buNone/>
+            </a:pPr>
+            <a:r>
+              <a:rPr lang="en-IN" sz="2000" b="1" dirty="0">
+                <a:latin typeface="Segoe UI" panose="020B0502040204020203" pitchFamily="34" charset="0"/>
+              </a:rPr>
+              <a:t>Future Goals:</a:t>
+            </a:r>
+            <a:endParaRPr lang="en-IN" sz="2000" dirty="0">
+              <a:latin typeface="Segoe UI" panose="020B0502040204020203" pitchFamily="34" charset="0"/>
+            </a:endParaRPr>
+          </a:p>
+          <a:p>
+            <a:pPr fontAlgn="t">
+              <a:lnSpc>
+                <a:spcPts val="1500"/>
+              </a:lnSpc>
+            </a:pPr>
+            <a:r>
+              <a:rPr lang="en-IN" sz="2000" dirty="0">
+                <a:latin typeface="Segoe UI" panose="020B0502040204020203" pitchFamily="34" charset="0"/>
+              </a:rPr>
+              <a:t>Fully electrified lineup by </a:t>
+            </a:r>
+            <a:r>
+              <a:rPr lang="en-IN" sz="2000" b="1" dirty="0">
+                <a:latin typeface="Segoe UI" panose="020B0502040204020203" pitchFamily="34" charset="0"/>
+              </a:rPr>
+              <a:t>2030</a:t>
+            </a:r>
+            <a:endParaRPr lang="en-IN" sz="2000" dirty="0">
+              <a:latin typeface="Segoe UI" panose="020B0502040204020203" pitchFamily="34" charset="0"/>
+            </a:endParaRPr>
+          </a:p>
+          <a:p>
+            <a:pPr fontAlgn="t">
+              <a:lnSpc>
+                <a:spcPts val="1500"/>
+              </a:lnSpc>
+            </a:pPr>
+            <a:r>
+              <a:rPr lang="en-IN" sz="2000" dirty="0">
+                <a:latin typeface="Segoe UI" panose="020B0502040204020203" pitchFamily="34" charset="0"/>
+              </a:rPr>
+              <a:t>Improved efficiency, performance &amp; sustainability</a:t>
+            </a:r>
+          </a:p>
+          <a:p>
+            <a:pPr fontAlgn="t">
+              <a:lnSpc>
+                <a:spcPts val="1500"/>
+              </a:lnSpc>
+            </a:pPr>
+            <a:r>
+              <a:rPr lang="en-IN" sz="2000" dirty="0">
+                <a:latin typeface="Segoe UI" panose="020B0502040204020203" pitchFamily="34" charset="0"/>
+              </a:rPr>
+              <a:t>Continuous feature upgrades via software</a:t>
+            </a:r>
+          </a:p>
+          <a:p>
+            <a:endParaRPr lang="en-IN" dirty="0"/>
+          </a:p>
+        </p:txBody>
+      </p:sp>
+    </p:spTree>
+    <p:extLst>
+      <p:ext uri="{BB962C8B-B14F-4D97-AF65-F5344CB8AC3E}">
+        <p14:creationId xmlns:p14="http://schemas.microsoft.com/office/powerpoint/2010/main" val="1022896505"/>
+      </p:ext>
+    </p:extLst>
+  </p:cSld>
+  <p:clrMapOvr>
+    <a:masterClrMapping/>
+  </p:clrMapOvr>
+</p:sld>
+</file>
+
+<file path=ppt/slides/slide23.xml><?xml version="1.0" encoding="utf-8"?>
+<p:sld xmlns:a="http://schemas.openxmlformats.org/drawingml/2006/main" xmlns:r="http://schemas.openxmlformats.org/officeDocument/2006/relationships" xmlns:p="http://schemas.openxmlformats.org/presentationml/2006/main">
+  <p:cSld>
+    <p:bg>
+      <p:bgPr>
+        <a:solidFill>
+          <a:schemeClr val="bg1"/>
+        </a:solidFill>
+        <a:effectLst/>
+      </p:bgPr>
+    </p:bg>
+    <p:spTree>
+      <p:nvGrpSpPr>
+        <p:cNvPr id="1" name=""/>
+        <p:cNvGrpSpPr/>
+        <p:nvPr/>
+      </p:nvGrpSpPr>
+      <p:grpSpPr>
+        <a:xfrm>
+          <a:off x="0" y="0"/>
+          <a:ext cx="0" cy="0"/>
+          <a:chOff x="0" y="0"/>
+          <a:chExt cx="0" cy="0"/>
+        </a:xfrm>
+      </p:grpSpPr>
+      <p:sp useBgFill="1">
+        <p:nvSpPr>
+          <p:cNvPr id="7" name="Rectangle 6">
+            <a:extLst>
+              <a:ext uri="{FF2B5EF4-FFF2-40B4-BE49-F238E27FC236}">
+                <a16:creationId xmlns:a16="http://schemas.microsoft.com/office/drawing/2014/main" id="{5463EB0A-3D7C-4AA5-BFA5-8EE5B4BA5624}"/>
+              </a:ext>
+              <a:ext uri="{C183D7F6-B498-43B3-948B-1728B52AA6E4}">
+                <adec:decorative xmlns:adec="http://schemas.microsoft.com/office/drawing/2017/decorative" val="1"/>
+              </a:ext>
+            </a:extLst>
+          </p:cNvPr>
+          <p:cNvSpPr>
+            <a:spLocks noGrp="1" noRot="1" noChangeAspect="1" noMove="1" noResize="1" noEditPoints="1" noAdjustHandles="1" noChangeArrowheads="1" noChangeShapeType="1" noTextEdit="1"/>
+          </p:cNvSpPr>
+          <p:nvPr>
+            <p:extLst>
+              <p:ext uri="{386F3935-93C4-4BCD-93E2-E3B085C9AB24}">
+                <p16:designElem xmlns:p16="http://schemas.microsoft.com/office/powerpoint/2015/main" val="1"/>
+              </p:ext>
+            </p:extLst>
+          </p:nvPr>
+        </p:nvSpPr>
+        <p:spPr>
+          <a:xfrm>
+            <a:off x="0" y="0"/>
+            <a:ext cx="12192000" cy="6858000"/>
+          </a:xfrm>
+          <a:prstGeom prst="rect">
+            <a:avLst/>
+          </a:prstGeom>
+          <a:ln>
+            <a:noFill/>
+          </a:ln>
+        </p:spPr>
+        <p:style>
+          <a:lnRef idx="2">
+            <a:schemeClr val="accent1">
+              <a:shade val="50000"/>
+            </a:schemeClr>
+          </a:lnRef>
+          <a:fillRef idx="1">
+            <a:schemeClr val="accent1"/>
+          </a:fillRef>
+          <a:effectRef idx="0">
+            <a:schemeClr val="accent1"/>
+          </a:effectRef>
+          <a:fontRef idx="minor">
+            <a:schemeClr val="lt1"/>
+          </a:fontRef>
+        </p:style>
+        <p:txBody>
+          <a:bodyPr rtlCol="0" anchor="ctr"/>
+          <a:lstStyle/>
+          <a:p>
+            <a:pPr algn="ctr"/>
+            <a:endParaRPr lang="en-US"/>
+          </a:p>
+        </p:txBody>
+      </p:sp>
+      <p:sp>
+        <p:nvSpPr>
+          <p:cNvPr id="2" name="Title 1"/>
+          <p:cNvSpPr>
+            <a:spLocks noGrp="1"/>
+          </p:cNvSpPr>
+          <p:nvPr>
+            <p:ph type="title"/>
+          </p:nvPr>
+        </p:nvSpPr>
+        <p:spPr>
+          <a:xfrm>
+            <a:off x="578651" y="1122363"/>
+            <a:ext cx="11034695" cy="3174690"/>
+          </a:xfrm>
+        </p:spPr>
+        <p:txBody>
+          <a:bodyPr vert="horz" lIns="91440" tIns="45720" rIns="91440" bIns="45720" rtlCol="0" anchor="b">
+            <a:normAutofit/>
+          </a:bodyPr>
+          <a:lstStyle/>
+          <a:p>
+            <a:r>
+              <a:rPr lang="en-US" sz="8000" kern="1200">
+                <a:solidFill>
+                  <a:schemeClr val="tx1"/>
+                </a:solidFill>
+                <a:latin typeface="+mj-lt"/>
+                <a:ea typeface="+mj-ea"/>
+                <a:cs typeface="+mj-cs"/>
+              </a:rPr>
               <a:t>Thank You</a:t>
             </a:r>
+          </a:p>
+        </p:txBody>
+      </p:sp>
+      <p:sp>
+        <p:nvSpPr>
+          <p:cNvPr id="9" name="Rectangle 8">
+            <a:extLst>
+              <a:ext uri="{FF2B5EF4-FFF2-40B4-BE49-F238E27FC236}">
+                <a16:creationId xmlns:a16="http://schemas.microsoft.com/office/drawing/2014/main" id="{7945AD00-F967-454D-A4B2-39ABA5C88C20}"/>
+              </a:ext>
+              <a:ext uri="{C183D7F6-B498-43B3-948B-1728B52AA6E4}">
+                <adec:decorative xmlns:adec="http://schemas.microsoft.com/office/drawing/2017/decorative" val="1"/>
+              </a:ext>
+            </a:extLst>
+          </p:cNvPr>
+          <p:cNvSpPr>
+            <a:spLocks noGrp="1" noRot="1" noChangeAspect="1" noMove="1" noResize="1" noEditPoints="1" noAdjustHandles="1" noChangeArrowheads="1" noChangeShapeType="1" noTextEdit="1"/>
+          </p:cNvSpPr>
+          <p:nvPr>
+            <p:extLst>
+              <p:ext uri="{386F3935-93C4-4BCD-93E2-E3B085C9AB24}">
+                <p16:designElem xmlns:p16="http://schemas.microsoft.com/office/powerpoint/2015/main" val="1"/>
+              </p:ext>
+            </p:extLst>
+          </p:nvPr>
+        </p:nvSpPr>
+        <p:spPr>
+          <a:xfrm rot="5400000">
+            <a:off x="857544" y="346791"/>
+            <a:ext cx="146304" cy="704088"/>
+          </a:xfrm>
+          <a:prstGeom prst="rect">
+            <a:avLst/>
+          </a:prstGeom>
+          <a:solidFill>
+            <a:schemeClr val="accent2"/>
+          </a:solidFill>
+          <a:ln>
+            <a:noFill/>
+          </a:ln>
+        </p:spPr>
+        <p:style>
+          <a:lnRef idx="2">
+            <a:schemeClr val="accent1">
+              <a:shade val="50000"/>
+            </a:schemeClr>
+          </a:lnRef>
+          <a:fillRef idx="1">
+            <a:schemeClr val="accent1"/>
+          </a:fillRef>
+          <a:effectRef idx="0">
+            <a:schemeClr val="accent1"/>
+          </a:effectRef>
+          <a:fontRef idx="minor">
+            <a:schemeClr val="lt1"/>
+          </a:fontRef>
+        </p:style>
+        <p:txBody>
+          <a:bodyPr rtlCol="0" anchor="ctr"/>
+          <a:lstStyle/>
+          <a:p>
+            <a:pPr marL="0" marR="0" lvl="0" indent="0" algn="ctr" defTabSz="914400" rtl="0" eaLnBrk="1" fontAlgn="auto" latinLnBrk="0" hangingPunct="1">
+              <a:lnSpc>
+                <a:spcPct val="100000"/>
+              </a:lnSpc>
+              <a:spcBef>
+                <a:spcPts val="0"/>
+              </a:spcBef>
+              <a:spcAft>
+                <a:spcPts val="0"/>
+              </a:spcAft>
+              <a:buClrTx/>
+              <a:buSzTx/>
+              <a:buFontTx/>
+              <a:buNone/>
+              <a:tabLst/>
+              <a:defRPr/>
+            </a:pPr>
+            <a:endParaRPr kumimoji="0" lang="en-US" sz="1800" b="0" i="0" u="none" strike="noStrike" kern="1200" cap="none" spc="0" normalizeH="0" baseline="0" noProof="0">
+              <a:ln>
+                <a:noFill/>
+              </a:ln>
+              <a:solidFill>
+                <a:prstClr val="white"/>
+              </a:solidFill>
+              <a:effectLst/>
+              <a:uLnTx/>
+              <a:uFillTx/>
+              <a:latin typeface="Calibri" panose="020F0502020204030204"/>
+              <a:ea typeface="+mn-ea"/>
+              <a:cs typeface="+mn-cs"/>
+            </a:endParaRPr>
+          </a:p>
+        </p:txBody>
+      </p:sp>
+      <p:sp>
+        <p:nvSpPr>
+          <p:cNvPr id="11" name="Rectangle 10">
+            <a:extLst>
+              <a:ext uri="{FF2B5EF4-FFF2-40B4-BE49-F238E27FC236}">
+                <a16:creationId xmlns:a16="http://schemas.microsoft.com/office/drawing/2014/main" id="{E9BC5B79-B912-427C-8219-E3E50943FCDE}"/>
+              </a:ext>
+              <a:ext uri="{C183D7F6-B498-43B3-948B-1728B52AA6E4}">
+                <adec:decorative xmlns:adec="http://schemas.microsoft.com/office/drawing/2017/decorative" val="1"/>
+              </a:ext>
+            </a:extLst>
+          </p:cNvPr>
+          <p:cNvSpPr>
+            <a:spLocks noGrp="1" noRot="1" noChangeAspect="1" noMove="1" noResize="1" noEditPoints="1" noAdjustHandles="1" noChangeArrowheads="1" noChangeShapeType="1" noTextEdit="1"/>
+          </p:cNvSpPr>
+          <p:nvPr>
+            <p:extLst>
+              <p:ext uri="{386F3935-93C4-4BCD-93E2-E3B085C9AB24}">
+                <p16:designElem xmlns:p16="http://schemas.microsoft.com/office/powerpoint/2015/main" val="1"/>
+              </p:ext>
+            </p:extLst>
+          </p:nvPr>
+        </p:nvSpPr>
+        <p:spPr>
+          <a:xfrm flipV="1">
+            <a:off x="578652" y="4501201"/>
+            <a:ext cx="11034696" cy="18288"/>
+          </a:xfrm>
+          <a:prstGeom prst="rect">
+            <a:avLst/>
+          </a:prstGeom>
+          <a:solidFill>
+            <a:srgbClr val="D5D5D5"/>
+          </a:solidFill>
+          <a:ln w="3175">
+            <a:noFill/>
+          </a:ln>
+          <a:effectLst/>
+        </p:spPr>
+        <p:style>
+          <a:lnRef idx="2">
+            <a:schemeClr val="accent1">
+              <a:shade val="50000"/>
+            </a:schemeClr>
+          </a:lnRef>
+          <a:fillRef idx="1">
+            <a:schemeClr val="accent1"/>
+          </a:fillRef>
+          <a:effectRef idx="0">
+            <a:schemeClr val="accent1"/>
+          </a:effectRef>
+          <a:fontRef idx="minor">
+            <a:schemeClr val="lt1"/>
+          </a:fontRef>
+        </p:style>
+        <p:txBody>
+          <a:bodyPr rtlCol="0" anchor="ctr"/>
+          <a:lstStyle/>
+          <a:p>
+            <a:pPr algn="ctr"/>
+            <a:endParaRPr lang="en-US">
+              <a:solidFill>
+                <a:prstClr val="white"/>
+              </a:solidFill>
+              <a:latin typeface="Calibri" panose="020F0502020204030204"/>
+            </a:endParaRPr>
           </a:p>
         </p:txBody>
       </p:sp>
@@ -22670,7 +23985,7 @@
                   <a:spcPts val="600"/>
                 </a:spcAft>
               </a:pPr>
-              <a:t>5/25/2026</a:t>
+              <a:t>5/28/2026</a:t>
             </a:fld>
             <a:endParaRPr lang="en-US">
               <a:solidFill>
